--- a/output/slide_v2.pptx
+++ b/output/slide_v2.pptx
@@ -10,8 +10,8 @@
   <p:notesMasterIdLst>
     <p:notesMasterId r:id="rId3"/>
   </p:notesMasterIdLst>
-  <p:sldSz cx="9144000" cy="5715000"/>
-  <p:notesSz cx="5715000" cy="9144000"/>
+  <p:sldSz cx="9144000" cy="5143500"/>
+  <p:notesSz cx="5143500" cy="9144000"/>
   <p:defaultTextStyle>
     <a:lvl1pPr marL="0" algn="l" defTabSz="914400" rtl="0" eaLnBrk="1" latinLnBrk="0" hangingPunct="1">
       <a:defRPr sz="1800" kern="1200">
@@ -883,8 +883,8 @@
         </p:nvSpPr>
         <p:spPr>
           <a:xfrm>
-            <a:off x="457200" y="320040"/>
-            <a:ext cx="8229600" cy="731520"/>
+            <a:off x="457200" y="137160"/>
+            <a:ext cx="8229600" cy="822960"/>
           </a:xfrm>
           <a:prstGeom prst="rect">
             <a:avLst/>
@@ -893,10 +893,13 @@
           <a:ln/>
         </p:spPr>
         <p:txBody>
-          <a:bodyPr wrap="square" lIns="0" tIns="0" rIns="0" bIns="0" rtlCol="0" anchor="t"/>
+          <a:bodyPr wrap="square" lIns="0" tIns="0" rIns="0" bIns="0" rtlCol="0" anchor="ctr"/>
           <a:lstStyle/>
           <a:p>
-            <a:pPr algn="l" indent="0" marL="0">
+            <a:pPr indent="0" marL="0">
+              <a:lnSpc>
+                <a:spcPct val="110000"/>
+              </a:lnSpc>
               <a:buNone/>
             </a:pPr>
             <a:r>
@@ -908,7 +911,27 @@
                 <a:ea typeface="Georgia" pitchFamily="34" charset="-122"/>
                 <a:cs typeface="Georgia" pitchFamily="34" charset="-120"/>
               </a:rPr>
-              <a:t>The Netherlands aims to become Europe's green hydrogen hub, scaling from 500 MW to 3–4 GW by 2030</a:t>
+              <a:t>1.1/ Blue and Green hydrogen are two low-carbon production</a:t>
+            </a:r>
+            <a:endParaRPr lang="en-US" sz="2200" dirty="0"/>
+          </a:p>
+          <a:p>
+            <a:pPr indent="0" marL="0">
+              <a:lnSpc>
+                <a:spcPct val="110000"/>
+              </a:lnSpc>
+              <a:buNone/>
+            </a:pPr>
+            <a:r>
+              <a:rPr lang="en-US" sz="2200" b="1" dirty="0">
+                <a:solidFill>
+                  <a:srgbClr val="000000"/>
+                </a:solidFill>
+                <a:latin typeface="Georgia" pitchFamily="34" charset="0"/>
+                <a:ea typeface="Georgia" pitchFamily="34" charset="-122"/>
+                <a:cs typeface="Georgia" pitchFamily="34" charset="-120"/>
+              </a:rPr>
+              <a:t>methods of H2 with the highest future potential</a:t>
             </a:r>
             <a:endParaRPr lang="en-US" sz="2200" dirty="0"/>
           </a:p>
@@ -916,61 +939,22 @@
       </p:sp>
       <p:sp>
         <p:nvSpPr>
-          <p:cNvPr id="3" name="Text 1"/>
+          <p:cNvPr id="3" name="Shape 1"/>
           <p:cNvSpPr/>
           <p:nvPr/>
         </p:nvSpPr>
         <p:spPr>
           <a:xfrm>
-            <a:off x="457200" y="1097280"/>
-            <a:ext cx="8229600" cy="274320"/>
-          </a:xfrm>
-          <a:prstGeom prst="rect">
-            <a:avLst/>
-          </a:prstGeom>
-          <a:noFill/>
-          <a:ln/>
-        </p:spPr>
-        <p:txBody>
-          <a:bodyPr wrap="square" lIns="0" tIns="0" rIns="0" bIns="0" rtlCol="0" anchor="ctr"/>
-          <a:lstStyle/>
-          <a:p>
-            <a:pPr algn="l" indent="0" marL="0">
-              <a:buNone/>
-            </a:pPr>
-            <a:r>
-              <a:rPr lang="en-US" sz="1000" dirty="0">
-                <a:solidFill>
-                  <a:srgbClr val="888888"/>
-                </a:solidFill>
-                <a:latin typeface="Calibri" pitchFamily="34" charset="0"/>
-                <a:ea typeface="Calibri" pitchFamily="34" charset="-122"/>
-                <a:cs typeface="Calibri" pitchFamily="34" charset="-120"/>
-              </a:rPr>
-              <a:t>Dutch Hydrogen Strategy timeline and key capacity milestones, 2020–2035</a:t>
-            </a:r>
-            <a:endParaRPr lang="en-US" sz="1000" dirty="0"/>
-          </a:p>
-        </p:txBody>
-      </p:sp>
-      <p:sp>
-        <p:nvSpPr>
-          <p:cNvPr id="4" name="Shape 2"/>
-          <p:cNvSpPr/>
-          <p:nvPr/>
-        </p:nvSpPr>
-        <p:spPr>
-          <a:xfrm>
-            <a:off x="457200" y="1371600"/>
+            <a:off x="457200" y="1051560"/>
             <a:ext cx="8229600" cy="0"/>
           </a:xfrm>
           <a:prstGeom prst="line">
             <a:avLst/>
           </a:prstGeom>
           <a:noFill/>
-          <a:ln w="9525">
+          <a:ln w="12700">
             <a:solidFill>
-              <a:srgbClr val="C00000"/>
+              <a:srgbClr val="333333"/>
             </a:solidFill>
             <a:prstDash val="solid"/>
           </a:ln>
@@ -978,57 +962,14 @@
       </p:sp>
       <p:sp>
         <p:nvSpPr>
-          <p:cNvPr id="5" name="Shape 3"/>
+          <p:cNvPr id="4" name="Text 2"/>
           <p:cNvSpPr/>
           <p:nvPr/>
         </p:nvSpPr>
         <p:spPr>
           <a:xfrm>
-            <a:off x="914400" y="2651760"/>
-            <a:ext cx="7315200" cy="0"/>
-          </a:xfrm>
-          <a:prstGeom prst="line">
-            <a:avLst/>
-          </a:prstGeom>
-          <a:noFill/>
-          <a:ln w="19050">
-            <a:solidFill>
-              <a:srgbClr val="0C2340"/>
-            </a:solidFill>
-            <a:prstDash val="solid"/>
-          </a:ln>
-        </p:spPr>
-      </p:sp>
-      <p:sp>
-        <p:nvSpPr>
-          <p:cNvPr id="6" name="Shape 4"/>
-          <p:cNvSpPr/>
-          <p:nvPr/>
-        </p:nvSpPr>
-        <p:spPr>
-          <a:xfrm>
-            <a:off x="786384" y="2523744"/>
-            <a:ext cx="256032" cy="256032"/>
-          </a:xfrm>
-          <a:prstGeom prst="ellipse">
-            <a:avLst/>
-          </a:prstGeom>
-          <a:solidFill>
-            <a:srgbClr val="0C2340"/>
-          </a:solidFill>
-          <a:ln/>
-        </p:spPr>
-      </p:sp>
-      <p:sp>
-        <p:nvSpPr>
-          <p:cNvPr id="7" name="Text 5"/>
-          <p:cNvSpPr/>
-          <p:nvPr/>
-        </p:nvSpPr>
-        <p:spPr>
-          <a:xfrm>
-            <a:off x="786384" y="2523744"/>
-            <a:ext cx="256032" cy="256032"/>
+            <a:off x="3200400" y="1143000"/>
+            <a:ext cx="5029200" cy="228600"/>
           </a:xfrm>
           <a:prstGeom prst="rect">
             <a:avLst/>
@@ -1044,650 +985,42 @@
               <a:buNone/>
             </a:pPr>
             <a:r>
-              <a:rPr lang="en-US" sz="800" b="1" dirty="0">
+              <a:rPr lang="en-US" sz="1000" b="1" dirty="0">
                 <a:solidFill>
-                  <a:srgbClr val="FFFFFF"/>
+                  <a:srgbClr val="333333"/>
                 </a:solidFill>
                 <a:latin typeface="Calibri" pitchFamily="34" charset="0"/>
                 <a:ea typeface="Calibri" pitchFamily="34" charset="-122"/>
                 <a:cs typeface="Calibri" pitchFamily="34" charset="-120"/>
               </a:rPr>
-              <a:t>2020</a:t>
+              <a:t>Low-carbon H2</a:t>
             </a:r>
-            <a:endParaRPr lang="en-US" sz="800" dirty="0"/>
+            <a:endParaRPr lang="en-US" sz="1000" dirty="0"/>
           </a:p>
         </p:txBody>
       </p:sp>
       <p:sp>
         <p:nvSpPr>
-          <p:cNvPr id="8" name="Text 6"/>
+          <p:cNvPr id="5" name="Shape 3"/>
           <p:cNvSpPr/>
           <p:nvPr/>
         </p:nvSpPr>
         <p:spPr>
           <a:xfrm>
-            <a:off x="320040" y="1783080"/>
-            <a:ext cx="1188720" cy="502920"/>
+            <a:off x="1828800" y="1389888"/>
+            <a:ext cx="6858000" cy="0"/>
           </a:xfrm>
-          <a:prstGeom prst="rect">
+          <a:prstGeom prst="line">
             <a:avLst/>
           </a:prstGeom>
           <a:noFill/>
-          <a:ln/>
+          <a:ln w="25400">
+            <a:solidFill>
+              <a:srgbClr val="1B3A5C"/>
+            </a:solidFill>
+            <a:prstDash val="solid"/>
+          </a:ln>
         </p:spPr>
-        <p:txBody>
-          <a:bodyPr wrap="square" lIns="0" tIns="0" rIns="0" bIns="0" rtlCol="0" anchor="b"/>
-          <a:lstStyle/>
-          <a:p>
-            <a:pPr algn="ctr" indent="0" marL="0">
-              <a:buNone/>
-            </a:pPr>
-            <a:r>
-              <a:rPr lang="en-US" sz="850" dirty="0">
-                <a:solidFill>
-                  <a:srgbClr val="404040"/>
-                </a:solidFill>
-                <a:latin typeface="Calibri" pitchFamily="34" charset="0"/>
-                <a:ea typeface="Calibri" pitchFamily="34" charset="-122"/>
-                <a:cs typeface="Calibri" pitchFamily="34" charset="-120"/>
-              </a:rPr>
-              <a:t>National Hydrogen</a:t>
-            </a:r>
-            <a:endParaRPr lang="en-US" sz="850" dirty="0"/>
-          </a:p>
-          <a:p>
-            <a:pPr algn="ctr" indent="0" marL="0">
-              <a:buNone/>
-            </a:pPr>
-            <a:r>
-              <a:rPr lang="en-US" sz="850" dirty="0">
-                <a:solidFill>
-                  <a:srgbClr val="404040"/>
-                </a:solidFill>
-                <a:latin typeface="Calibri" pitchFamily="34" charset="0"/>
-                <a:ea typeface="Calibri" pitchFamily="34" charset="-122"/>
-                <a:cs typeface="Calibri" pitchFamily="34" charset="-120"/>
-              </a:rPr>
-              <a:t>Strategy published</a:t>
-            </a:r>
-            <a:endParaRPr lang="en-US" sz="850" dirty="0"/>
-          </a:p>
-        </p:txBody>
-      </p:sp>
-      <p:sp>
-        <p:nvSpPr>
-          <p:cNvPr id="9" name="Shape 7"/>
-          <p:cNvSpPr/>
-          <p:nvPr/>
-        </p:nvSpPr>
-        <p:spPr>
-          <a:xfrm>
-            <a:off x="2249424" y="2523744"/>
-            <a:ext cx="256032" cy="256032"/>
-          </a:xfrm>
-          <a:prstGeom prst="ellipse">
-            <a:avLst/>
-          </a:prstGeom>
-          <a:solidFill>
-            <a:srgbClr val="0C2340"/>
-          </a:solidFill>
-          <a:ln/>
-        </p:spPr>
-      </p:sp>
-      <p:sp>
-        <p:nvSpPr>
-          <p:cNvPr id="10" name="Text 8"/>
-          <p:cNvSpPr/>
-          <p:nvPr/>
-        </p:nvSpPr>
-        <p:spPr>
-          <a:xfrm>
-            <a:off x="2249424" y="2523744"/>
-            <a:ext cx="256032" cy="256032"/>
-          </a:xfrm>
-          <a:prstGeom prst="rect">
-            <a:avLst/>
-          </a:prstGeom>
-          <a:noFill/>
-          <a:ln/>
-        </p:spPr>
-        <p:txBody>
-          <a:bodyPr wrap="square" lIns="0" tIns="0" rIns="0" bIns="0" rtlCol="0" anchor="ctr"/>
-          <a:lstStyle/>
-          <a:p>
-            <a:pPr algn="ctr" indent="0" marL="0">
-              <a:buNone/>
-            </a:pPr>
-            <a:r>
-              <a:rPr lang="en-US" sz="800" b="1" dirty="0">
-                <a:solidFill>
-                  <a:srgbClr val="FFFFFF"/>
-                </a:solidFill>
-                <a:latin typeface="Calibri" pitchFamily="34" charset="0"/>
-                <a:ea typeface="Calibri" pitchFamily="34" charset="-122"/>
-                <a:cs typeface="Calibri" pitchFamily="34" charset="-120"/>
-              </a:rPr>
-              <a:t>2022</a:t>
-            </a:r>
-            <a:endParaRPr lang="en-US" sz="800" dirty="0"/>
-          </a:p>
-        </p:txBody>
-      </p:sp>
-      <p:sp>
-        <p:nvSpPr>
-          <p:cNvPr id="11" name="Text 9"/>
-          <p:cNvSpPr/>
-          <p:nvPr/>
-        </p:nvSpPr>
-        <p:spPr>
-          <a:xfrm>
-            <a:off x="1783080" y="2852928"/>
-            <a:ext cx="1188720" cy="502920"/>
-          </a:xfrm>
-          <a:prstGeom prst="rect">
-            <a:avLst/>
-          </a:prstGeom>
-          <a:noFill/>
-          <a:ln/>
-        </p:spPr>
-        <p:txBody>
-          <a:bodyPr wrap="square" lIns="0" tIns="0" rIns="0" bIns="0" rtlCol="0" anchor="t"/>
-          <a:lstStyle/>
-          <a:p>
-            <a:pPr algn="ctr" indent="0" marL="0">
-              <a:buNone/>
-            </a:pPr>
-            <a:r>
-              <a:rPr lang="en-US" sz="850" dirty="0">
-                <a:solidFill>
-                  <a:srgbClr val="404040"/>
-                </a:solidFill>
-                <a:latin typeface="Calibri" pitchFamily="34" charset="0"/>
-                <a:ea typeface="Calibri" pitchFamily="34" charset="-122"/>
-                <a:cs typeface="Calibri" pitchFamily="34" charset="-120"/>
-              </a:rPr>
-              <a:t>REPowerEU plan</a:t>
-            </a:r>
-            <a:endParaRPr lang="en-US" sz="850" dirty="0"/>
-          </a:p>
-          <a:p>
-            <a:pPr algn="ctr" indent="0" marL="0">
-              <a:buNone/>
-            </a:pPr>
-            <a:r>
-              <a:rPr lang="en-US" sz="850" dirty="0">
-                <a:solidFill>
-                  <a:srgbClr val="404040"/>
-                </a:solidFill>
-                <a:latin typeface="Calibri" pitchFamily="34" charset="0"/>
-                <a:ea typeface="Calibri" pitchFamily="34" charset="-122"/>
-                <a:cs typeface="Calibri" pitchFamily="34" charset="-120"/>
-              </a:rPr>
-              <a:t>accelerates ambitions</a:t>
-            </a:r>
-            <a:endParaRPr lang="en-US" sz="850" dirty="0"/>
-          </a:p>
-        </p:txBody>
-      </p:sp>
-      <p:sp>
-        <p:nvSpPr>
-          <p:cNvPr id="12" name="Shape 10"/>
-          <p:cNvSpPr/>
-          <p:nvPr/>
-        </p:nvSpPr>
-        <p:spPr>
-          <a:xfrm>
-            <a:off x="3712464" y="2523744"/>
-            <a:ext cx="256032" cy="256032"/>
-          </a:xfrm>
-          <a:prstGeom prst="ellipse">
-            <a:avLst/>
-          </a:prstGeom>
-          <a:solidFill>
-            <a:srgbClr val="0C2340"/>
-          </a:solidFill>
-          <a:ln/>
-        </p:spPr>
-      </p:sp>
-      <p:sp>
-        <p:nvSpPr>
-          <p:cNvPr id="13" name="Text 11"/>
-          <p:cNvSpPr/>
-          <p:nvPr/>
-        </p:nvSpPr>
-        <p:spPr>
-          <a:xfrm>
-            <a:off x="3712464" y="2523744"/>
-            <a:ext cx="256032" cy="256032"/>
-          </a:xfrm>
-          <a:prstGeom prst="rect">
-            <a:avLst/>
-          </a:prstGeom>
-          <a:noFill/>
-          <a:ln/>
-        </p:spPr>
-        <p:txBody>
-          <a:bodyPr wrap="square" lIns="0" tIns="0" rIns="0" bIns="0" rtlCol="0" anchor="ctr"/>
-          <a:lstStyle/>
-          <a:p>
-            <a:pPr algn="ctr" indent="0" marL="0">
-              <a:buNone/>
-            </a:pPr>
-            <a:r>
-              <a:rPr lang="en-US" sz="800" b="1" dirty="0">
-                <a:solidFill>
-                  <a:srgbClr val="FFFFFF"/>
-                </a:solidFill>
-                <a:latin typeface="Calibri" pitchFamily="34" charset="0"/>
-                <a:ea typeface="Calibri" pitchFamily="34" charset="-122"/>
-                <a:cs typeface="Calibri" pitchFamily="34" charset="-120"/>
-              </a:rPr>
-              <a:t>2025</a:t>
-            </a:r>
-            <a:endParaRPr lang="en-US" sz="800" dirty="0"/>
-          </a:p>
-        </p:txBody>
-      </p:sp>
-      <p:sp>
-        <p:nvSpPr>
-          <p:cNvPr id="14" name="Text 12"/>
-          <p:cNvSpPr/>
-          <p:nvPr/>
-        </p:nvSpPr>
-        <p:spPr>
-          <a:xfrm>
-            <a:off x="3246120" y="1783080"/>
-            <a:ext cx="1188720" cy="502920"/>
-          </a:xfrm>
-          <a:prstGeom prst="rect">
-            <a:avLst/>
-          </a:prstGeom>
-          <a:noFill/>
-          <a:ln/>
-        </p:spPr>
-        <p:txBody>
-          <a:bodyPr wrap="square" lIns="0" tIns="0" rIns="0" bIns="0" rtlCol="0" anchor="b"/>
-          <a:lstStyle/>
-          <a:p>
-            <a:pPr algn="ctr" indent="0" marL="0">
-              <a:buNone/>
-            </a:pPr>
-            <a:r>
-              <a:rPr lang="en-US" sz="850" dirty="0">
-                <a:solidFill>
-                  <a:srgbClr val="404040"/>
-                </a:solidFill>
-                <a:latin typeface="Calibri" pitchFamily="34" charset="0"/>
-                <a:ea typeface="Calibri" pitchFamily="34" charset="-122"/>
-                <a:cs typeface="Calibri" pitchFamily="34" charset="-120"/>
-              </a:rPr>
-              <a:t>First green H2</a:t>
-            </a:r>
-            <a:endParaRPr lang="en-US" sz="850" dirty="0"/>
-          </a:p>
-          <a:p>
-            <a:pPr algn="ctr" indent="0" marL="0">
-              <a:buNone/>
-            </a:pPr>
-            <a:r>
-              <a:rPr lang="en-US" sz="850" dirty="0">
-                <a:solidFill>
-                  <a:srgbClr val="404040"/>
-                </a:solidFill>
-                <a:latin typeface="Calibri" pitchFamily="34" charset="0"/>
-                <a:ea typeface="Calibri" pitchFamily="34" charset="-122"/>
-                <a:cs typeface="Calibri" pitchFamily="34" charset="-120"/>
-              </a:rPr>
-              <a:t>hubs operational</a:t>
-            </a:r>
-            <a:endParaRPr lang="en-US" sz="850" dirty="0"/>
-          </a:p>
-        </p:txBody>
-      </p:sp>
-      <p:sp>
-        <p:nvSpPr>
-          <p:cNvPr id="15" name="Shape 13"/>
-          <p:cNvSpPr/>
-          <p:nvPr/>
-        </p:nvSpPr>
-        <p:spPr>
-          <a:xfrm>
-            <a:off x="5175504" y="2523744"/>
-            <a:ext cx="256032" cy="256032"/>
-          </a:xfrm>
-          <a:prstGeom prst="ellipse">
-            <a:avLst/>
-          </a:prstGeom>
-          <a:solidFill>
-            <a:srgbClr val="0C2340"/>
-          </a:solidFill>
-          <a:ln/>
-        </p:spPr>
-      </p:sp>
-      <p:sp>
-        <p:nvSpPr>
-          <p:cNvPr id="16" name="Text 14"/>
-          <p:cNvSpPr/>
-          <p:nvPr/>
-        </p:nvSpPr>
-        <p:spPr>
-          <a:xfrm>
-            <a:off x="5175504" y="2523744"/>
-            <a:ext cx="256032" cy="256032"/>
-          </a:xfrm>
-          <a:prstGeom prst="rect">
-            <a:avLst/>
-          </a:prstGeom>
-          <a:noFill/>
-          <a:ln/>
-        </p:spPr>
-        <p:txBody>
-          <a:bodyPr wrap="square" lIns="0" tIns="0" rIns="0" bIns="0" rtlCol="0" anchor="ctr"/>
-          <a:lstStyle/>
-          <a:p>
-            <a:pPr algn="ctr" indent="0" marL="0">
-              <a:buNone/>
-            </a:pPr>
-            <a:r>
-              <a:rPr lang="en-US" sz="800" b="1" dirty="0">
-                <a:solidFill>
-                  <a:srgbClr val="FFFFFF"/>
-                </a:solidFill>
-                <a:latin typeface="Calibri" pitchFamily="34" charset="0"/>
-                <a:ea typeface="Calibri" pitchFamily="34" charset="-122"/>
-                <a:cs typeface="Calibri" pitchFamily="34" charset="-120"/>
-              </a:rPr>
-              <a:t>2028</a:t>
-            </a:r>
-            <a:endParaRPr lang="en-US" sz="800" dirty="0"/>
-          </a:p>
-        </p:txBody>
-      </p:sp>
-      <p:sp>
-        <p:nvSpPr>
-          <p:cNvPr id="17" name="Text 15"/>
-          <p:cNvSpPr/>
-          <p:nvPr/>
-        </p:nvSpPr>
-        <p:spPr>
-          <a:xfrm>
-            <a:off x="4709160" y="2852928"/>
-            <a:ext cx="1188720" cy="502920"/>
-          </a:xfrm>
-          <a:prstGeom prst="rect">
-            <a:avLst/>
-          </a:prstGeom>
-          <a:noFill/>
-          <a:ln/>
-        </p:spPr>
-        <p:txBody>
-          <a:bodyPr wrap="square" lIns="0" tIns="0" rIns="0" bIns="0" rtlCol="0" anchor="t"/>
-          <a:lstStyle/>
-          <a:p>
-            <a:pPr algn="ctr" indent="0" marL="0">
-              <a:buNone/>
-            </a:pPr>
-            <a:r>
-              <a:rPr lang="en-US" sz="850" dirty="0">
-                <a:solidFill>
-                  <a:srgbClr val="404040"/>
-                </a:solidFill>
-                <a:latin typeface="Calibri" pitchFamily="34" charset="0"/>
-                <a:ea typeface="Calibri" pitchFamily="34" charset="-122"/>
-                <a:cs typeface="Calibri" pitchFamily="34" charset="-120"/>
-              </a:rPr>
-              <a:t>HyNetwork backbone</a:t>
-            </a:r>
-            <a:endParaRPr lang="en-US" sz="850" dirty="0"/>
-          </a:p>
-          <a:p>
-            <a:pPr algn="ctr" indent="0" marL="0">
-              <a:buNone/>
-            </a:pPr>
-            <a:r>
-              <a:rPr lang="en-US" sz="850" dirty="0">
-                <a:solidFill>
-                  <a:srgbClr val="404040"/>
-                </a:solidFill>
-                <a:latin typeface="Calibri" pitchFamily="34" charset="0"/>
-                <a:ea typeface="Calibri" pitchFamily="34" charset="-122"/>
-                <a:cs typeface="Calibri" pitchFamily="34" charset="-120"/>
-              </a:rPr>
-              <a:t>pipeline live</a:t>
-            </a:r>
-            <a:endParaRPr lang="en-US" sz="850" dirty="0"/>
-          </a:p>
-        </p:txBody>
-      </p:sp>
-      <p:sp>
-        <p:nvSpPr>
-          <p:cNvPr id="18" name="Shape 16"/>
-          <p:cNvSpPr/>
-          <p:nvPr/>
-        </p:nvSpPr>
-        <p:spPr>
-          <a:xfrm>
-            <a:off x="6638544" y="2523744"/>
-            <a:ext cx="256032" cy="256032"/>
-          </a:xfrm>
-          <a:prstGeom prst="ellipse">
-            <a:avLst/>
-          </a:prstGeom>
-          <a:solidFill>
-            <a:srgbClr val="0C2340"/>
-          </a:solidFill>
-          <a:ln/>
-        </p:spPr>
-      </p:sp>
-      <p:sp>
-        <p:nvSpPr>
-          <p:cNvPr id="19" name="Text 17"/>
-          <p:cNvSpPr/>
-          <p:nvPr/>
-        </p:nvSpPr>
-        <p:spPr>
-          <a:xfrm>
-            <a:off x="6638544" y="2523744"/>
-            <a:ext cx="256032" cy="256032"/>
-          </a:xfrm>
-          <a:prstGeom prst="rect">
-            <a:avLst/>
-          </a:prstGeom>
-          <a:noFill/>
-          <a:ln/>
-        </p:spPr>
-        <p:txBody>
-          <a:bodyPr wrap="square" lIns="0" tIns="0" rIns="0" bIns="0" rtlCol="0" anchor="ctr"/>
-          <a:lstStyle/>
-          <a:p>
-            <a:pPr algn="ctr" indent="0" marL="0">
-              <a:buNone/>
-            </a:pPr>
-            <a:r>
-              <a:rPr lang="en-US" sz="800" b="1" dirty="0">
-                <a:solidFill>
-                  <a:srgbClr val="FFFFFF"/>
-                </a:solidFill>
-                <a:latin typeface="Calibri" pitchFamily="34" charset="0"/>
-                <a:ea typeface="Calibri" pitchFamily="34" charset="-122"/>
-                <a:cs typeface="Calibri" pitchFamily="34" charset="-120"/>
-              </a:rPr>
-              <a:t>2030</a:t>
-            </a:r>
-            <a:endParaRPr lang="en-US" sz="800" dirty="0"/>
-          </a:p>
-        </p:txBody>
-      </p:sp>
-      <p:sp>
-        <p:nvSpPr>
-          <p:cNvPr id="20" name="Text 18"/>
-          <p:cNvSpPr/>
-          <p:nvPr/>
-        </p:nvSpPr>
-        <p:spPr>
-          <a:xfrm>
-            <a:off x="6172200" y="1783080"/>
-            <a:ext cx="1188720" cy="502920"/>
-          </a:xfrm>
-          <a:prstGeom prst="rect">
-            <a:avLst/>
-          </a:prstGeom>
-          <a:noFill/>
-          <a:ln/>
-        </p:spPr>
-        <p:txBody>
-          <a:bodyPr wrap="square" lIns="0" tIns="0" rIns="0" bIns="0" rtlCol="0" anchor="b"/>
-          <a:lstStyle/>
-          <a:p>
-            <a:pPr algn="ctr" indent="0" marL="0">
-              <a:buNone/>
-            </a:pPr>
-            <a:r>
-              <a:rPr lang="en-US" sz="850" dirty="0">
-                <a:solidFill>
-                  <a:srgbClr val="404040"/>
-                </a:solidFill>
-                <a:latin typeface="Calibri" pitchFamily="34" charset="0"/>
-                <a:ea typeface="Calibri" pitchFamily="34" charset="-122"/>
-                <a:cs typeface="Calibri" pitchFamily="34" charset="-120"/>
-              </a:rPr>
-              <a:t>Scale-up phase</a:t>
-            </a:r>
-            <a:endParaRPr lang="en-US" sz="850" dirty="0"/>
-          </a:p>
-          <a:p>
-            <a:pPr algn="ctr" indent="0" marL="0">
-              <a:buNone/>
-            </a:pPr>
-            <a:r>
-              <a:rPr lang="en-US" sz="850" dirty="0">
-                <a:solidFill>
-                  <a:srgbClr val="404040"/>
-                </a:solidFill>
-                <a:latin typeface="Calibri" pitchFamily="34" charset="0"/>
-                <a:ea typeface="Calibri" pitchFamily="34" charset="-122"/>
-                <a:cs typeface="Calibri" pitchFamily="34" charset="-120"/>
-              </a:rPr>
-              <a:t>complete</a:t>
-            </a:r>
-            <a:endParaRPr lang="en-US" sz="850" dirty="0"/>
-          </a:p>
-        </p:txBody>
-      </p:sp>
-      <p:sp>
-        <p:nvSpPr>
-          <p:cNvPr id="21" name="Shape 19"/>
-          <p:cNvSpPr/>
-          <p:nvPr/>
-        </p:nvSpPr>
-        <p:spPr>
-          <a:xfrm>
-            <a:off x="8101584" y="2523744"/>
-            <a:ext cx="256032" cy="256032"/>
-          </a:xfrm>
-          <a:prstGeom prst="ellipse">
-            <a:avLst/>
-          </a:prstGeom>
-          <a:solidFill>
-            <a:srgbClr val="0C2340"/>
-          </a:solidFill>
-          <a:ln/>
-        </p:spPr>
-      </p:sp>
-      <p:sp>
-        <p:nvSpPr>
-          <p:cNvPr id="22" name="Text 20"/>
-          <p:cNvSpPr/>
-          <p:nvPr/>
-        </p:nvSpPr>
-        <p:spPr>
-          <a:xfrm>
-            <a:off x="8101584" y="2523744"/>
-            <a:ext cx="256032" cy="256032"/>
-          </a:xfrm>
-          <a:prstGeom prst="rect">
-            <a:avLst/>
-          </a:prstGeom>
-          <a:noFill/>
-          <a:ln/>
-        </p:spPr>
-        <p:txBody>
-          <a:bodyPr wrap="square" lIns="0" tIns="0" rIns="0" bIns="0" rtlCol="0" anchor="ctr"/>
-          <a:lstStyle/>
-          <a:p>
-            <a:pPr algn="ctr" indent="0" marL="0">
-              <a:buNone/>
-            </a:pPr>
-            <a:r>
-              <a:rPr lang="en-US" sz="800" b="1" dirty="0">
-                <a:solidFill>
-                  <a:srgbClr val="FFFFFF"/>
-                </a:solidFill>
-                <a:latin typeface="Calibri" pitchFamily="34" charset="0"/>
-                <a:ea typeface="Calibri" pitchFamily="34" charset="-122"/>
-                <a:cs typeface="Calibri" pitchFamily="34" charset="-120"/>
-              </a:rPr>
-              <a:t>2035</a:t>
-            </a:r>
-            <a:endParaRPr lang="en-US" sz="800" dirty="0"/>
-          </a:p>
-        </p:txBody>
-      </p:sp>
-      <p:sp>
-        <p:nvSpPr>
-          <p:cNvPr id="23" name="Text 21"/>
-          <p:cNvSpPr/>
-          <p:nvPr/>
-        </p:nvSpPr>
-        <p:spPr>
-          <a:xfrm>
-            <a:off x="7635240" y="2852928"/>
-            <a:ext cx="1188720" cy="502920"/>
-          </a:xfrm>
-          <a:prstGeom prst="rect">
-            <a:avLst/>
-          </a:prstGeom>
-          <a:noFill/>
-          <a:ln/>
-        </p:spPr>
-        <p:txBody>
-          <a:bodyPr wrap="square" lIns="0" tIns="0" rIns="0" bIns="0" rtlCol="0" anchor="t"/>
-          <a:lstStyle/>
-          <a:p>
-            <a:pPr algn="ctr" indent="0" marL="0">
-              <a:buNone/>
-            </a:pPr>
-            <a:r>
-              <a:rPr lang="en-US" sz="850" dirty="0">
-                <a:solidFill>
-                  <a:srgbClr val="404040"/>
-                </a:solidFill>
-                <a:latin typeface="Calibri" pitchFamily="34" charset="0"/>
-                <a:ea typeface="Calibri" pitchFamily="34" charset="-122"/>
-                <a:cs typeface="Calibri" pitchFamily="34" charset="-120"/>
-              </a:rPr>
-              <a:t>EU hydrogen corridor</a:t>
-            </a:r>
-            <a:endParaRPr lang="en-US" sz="850" dirty="0"/>
-          </a:p>
-          <a:p>
-            <a:pPr algn="ctr" indent="0" marL="0">
-              <a:buNone/>
-            </a:pPr>
-            <a:r>
-              <a:rPr lang="en-US" sz="850" dirty="0">
-                <a:solidFill>
-                  <a:srgbClr val="404040"/>
-                </a:solidFill>
-                <a:latin typeface="Calibri" pitchFamily="34" charset="0"/>
-                <a:ea typeface="Calibri" pitchFamily="34" charset="-122"/>
-                <a:cs typeface="Calibri" pitchFamily="34" charset="-120"/>
-              </a:rPr>
-              <a:t>integration</a:t>
-            </a:r>
-            <a:endParaRPr lang="en-US" sz="850" dirty="0"/>
-          </a:p>
-        </p:txBody>
       </p:sp>
       <p:graphicFrame>
         <p:nvGraphicFramePr>
@@ -1704,85 +1037,71 @@
           </p:nvPr>
         </p:nvGraphicFramePr>
         <p:xfrm>
-          <a:off x="457200" y="3566160"/>
-          <a:ext cx="8229600" cy="914400"/>
+          <a:off x="457200" y="1399032"/>
+          <a:ext cx="8229600" cy="3017520"/>
         </p:xfrm>
         <a:graphic>
           <a:graphicData uri="http://schemas.openxmlformats.org/drawingml/2006/table">
             <a:tbl>
               <a:tblPr/>
               <a:tblGrid>
-                <a:gridCol w="2011680"/>
-                <a:gridCol w="1243584"/>
-                <a:gridCol w="1243584"/>
-                <a:gridCol w="1243584"/>
-                <a:gridCol w="1243584"/>
-                <a:gridCol w="1243584"/>
+                <a:gridCol w="1371600"/>
+                <a:gridCol w="2286000"/>
+                <a:gridCol w="2286000"/>
+                <a:gridCol w="2286000"/>
               </a:tblGrid>
-              <a:tr h="274320">
+              <a:tr h="320040">
                 <a:tc>
                   <a:txBody>
                     <a:bodyPr/>
                     <a:lstStyle/>
                     <a:p>
-                      <a:pPr algn="l" indent="0" marL="0">
-                        <a:buNone/>
-                      </a:pPr>
-                      <a:r>
-                        <a:rPr lang="en-US" sz="850" b="1" dirty="0">
-                          <a:solidFill>
-                            <a:srgbClr val="0C2340"/>
-                          </a:solidFill>
-                          <a:latin typeface="Calibri" pitchFamily="34" charset="0"/>
-                          <a:ea typeface="Calibri" pitchFamily="34" charset="-122"/>
-                          <a:cs typeface="Calibri" pitchFamily="34" charset="-120"/>
-                        </a:rPr>
-                        <a:t>Metric</a:t>
-                      </a:r>
-                      <a:endParaRPr lang="en-US" sz="850" dirty="0">
-                        <a:latin typeface="Calibri" charset="0"/>
-                        <a:ea typeface="Calibri" charset="0"/>
-                        <a:cs typeface="Calibri" charset="0"/>
-                      </a:endParaRPr>
+                      <a:pPr indent="0" marL="0">
+                        <a:buNone/>
+                      </a:pPr>
+                      <a:endParaRPr lang="en-US" sz="1000" dirty="0"/>
                     </a:p>
                   </a:txBody>
-                  <a:tcPr marL="50800" marR="50800" marT="25400" marB="25400" anchor="ctr">
-                    <a:lnL w="0" cap="flat" cmpd="sng" algn="ctr">
-                      <a:solidFill>
-                        <a:srgbClr val="FFFFFF"/>
+                  <a:tcPr marL="91440" marR="91440" marT="45720" marB="45720">
+                    <a:lnL w="9525" cap="flat" cmpd="sng" algn="ctr">
+                      <a:solidFill>
+                        <a:srgbClr val="C0C0C0"/>
                       </a:solidFill>
                       <a:prstDash val="solid"/>
                       <a:round/>
                       <a:headEnd type="none" w="med" len="med"/>
                       <a:tailEnd type="none" w="med" len="med"/>
                     </a:lnL>
-                    <a:lnR w="0" cap="flat" cmpd="sng" algn="ctr">
-                      <a:solidFill>
-                        <a:srgbClr val="FFFFFF"/>
+                    <a:lnR w="9525" cap="flat" cmpd="sng" algn="ctr">
+                      <a:solidFill>
+                        <a:srgbClr val="C0C0C0"/>
                       </a:solidFill>
                       <a:prstDash val="solid"/>
                       <a:round/>
                       <a:headEnd type="none" w="med" len="med"/>
                       <a:tailEnd type="none" w="med" len="med"/>
                     </a:lnR>
-                    <a:lnT w="19050" cap="flat" cmpd="sng" algn="ctr">
-                      <a:solidFill>
-                        <a:srgbClr val="0C2340"/>
+                    <a:lnT w="9525" cap="flat" cmpd="sng" algn="ctr">
+                      <a:solidFill>
+                        <a:srgbClr val="C0C0C0"/>
                       </a:solidFill>
                       <a:prstDash val="solid"/>
                       <a:round/>
                       <a:headEnd type="none" w="med" len="med"/>
                       <a:tailEnd type="none" w="med" len="med"/>
                     </a:lnT>
-                    <a:lnB w="19050" cap="flat" cmpd="sng" algn="ctr">
-                      <a:solidFill>
-                        <a:srgbClr val="0C2340"/>
+                    <a:lnB w="9525" cap="flat" cmpd="sng" algn="ctr">
+                      <a:solidFill>
+                        <a:srgbClr val="C0C0C0"/>
                       </a:solidFill>
                       <a:prstDash val="solid"/>
                       <a:round/>
                       <a:headEnd type="none" w="med" len="med"/>
                       <a:tailEnd type="none" w="med" len="med"/>
                     </a:lnB>
+                    <a:solidFill>
+                      <a:srgbClr val="FFFFFF"/>
+                    </a:solidFill>
                   </a:tcPr>
                 </a:tc>
                 <a:tc>
@@ -1794,60 +1113,84 @@
                         <a:buNone/>
                       </a:pPr>
                       <a:r>
-                        <a:rPr lang="en-US" sz="850" b="1" dirty="0">
-                          <a:solidFill>
-                            <a:srgbClr val="0C2340"/>
-                          </a:solidFill>
-                          <a:latin typeface="Calibri" pitchFamily="34" charset="0"/>
-                          <a:ea typeface="Calibri" pitchFamily="34" charset="-122"/>
-                          <a:cs typeface="Calibri" pitchFamily="34" charset="-120"/>
-                        </a:rPr>
-                        <a:t>2020</a:t>
-                      </a:r>
-                      <a:endParaRPr lang="en-US" sz="850" dirty="0">
+                        <a:rPr lang="en-US" sz="1100" b="1" dirty="0">
+                          <a:solidFill>
+                            <a:srgbClr val="000000"/>
+                          </a:solidFill>
+                          <a:latin typeface="Calibri" pitchFamily="34" charset="0"/>
+                          <a:ea typeface="Calibri" pitchFamily="34" charset="-122"/>
+                          <a:cs typeface="Calibri" pitchFamily="34" charset="-120"/>
+                        </a:rPr>
+                        <a:t>Grey</a:t>
+                      </a:r>
+                      <a:endParaRPr lang="en-US" sz="1100" dirty="0">
+                        <a:latin typeface="Calibri" charset="0"/>
+                        <a:ea typeface="Calibri" charset="0"/>
+                        <a:cs typeface="Calibri" charset="0"/>
+                      </a:endParaRPr>
+                    </a:p>
+                    <a:p>
+                      <a:pPr algn="ctr" indent="0" marL="0">
+                        <a:buNone/>
+                      </a:pPr>
+                      <a:r>
+                        <a:rPr lang="en-US" sz="1100" b="1" dirty="0">
+                          <a:solidFill>
+                            <a:srgbClr val="000000"/>
+                          </a:solidFill>
+                          <a:latin typeface="Calibri" pitchFamily="34" charset="0"/>
+                          <a:ea typeface="Calibri" pitchFamily="34" charset="-122"/>
+                          <a:cs typeface="Calibri" pitchFamily="34" charset="-120"/>
+                        </a:rPr>
+                        <a:t>H2</a:t>
+                      </a:r>
+                      <a:endParaRPr lang="en-US" sz="1100" dirty="0">
                         <a:latin typeface="Calibri" charset="0"/>
                         <a:ea typeface="Calibri" charset="0"/>
                         <a:cs typeface="Calibri" charset="0"/>
                       </a:endParaRPr>
                     </a:p>
                   </a:txBody>
-                  <a:tcPr marL="50800" marR="50800" marT="25400" marB="25400" anchor="ctr">
-                    <a:lnL w="0" cap="flat" cmpd="sng" algn="ctr">
-                      <a:solidFill>
-                        <a:srgbClr val="FFFFFF"/>
+                  <a:tcPr marL="91440" marR="91440" marT="45720" marB="45720" anchor="ctr">
+                    <a:lnL w="9525" cap="flat" cmpd="sng" algn="ctr">
+                      <a:solidFill>
+                        <a:srgbClr val="C0C0C0"/>
                       </a:solidFill>
                       <a:prstDash val="solid"/>
                       <a:round/>
                       <a:headEnd type="none" w="med" len="med"/>
                       <a:tailEnd type="none" w="med" len="med"/>
                     </a:lnL>
-                    <a:lnR w="0" cap="flat" cmpd="sng" algn="ctr">
-                      <a:solidFill>
-                        <a:srgbClr val="FFFFFF"/>
+                    <a:lnR w="9525" cap="flat" cmpd="sng" algn="ctr">
+                      <a:solidFill>
+                        <a:srgbClr val="C0C0C0"/>
                       </a:solidFill>
                       <a:prstDash val="solid"/>
                       <a:round/>
                       <a:headEnd type="none" w="med" len="med"/>
                       <a:tailEnd type="none" w="med" len="med"/>
                     </a:lnR>
-                    <a:lnT w="19050" cap="flat" cmpd="sng" algn="ctr">
-                      <a:solidFill>
-                        <a:srgbClr val="0C2340"/>
+                    <a:lnT w="9525" cap="flat" cmpd="sng" algn="ctr">
+                      <a:solidFill>
+                        <a:srgbClr val="C0C0C0"/>
                       </a:solidFill>
                       <a:prstDash val="solid"/>
                       <a:round/>
                       <a:headEnd type="none" w="med" len="med"/>
                       <a:tailEnd type="none" w="med" len="med"/>
                     </a:lnT>
-                    <a:lnB w="19050" cap="flat" cmpd="sng" algn="ctr">
-                      <a:solidFill>
-                        <a:srgbClr val="0C2340"/>
+                    <a:lnB w="9525" cap="flat" cmpd="sng" algn="ctr">
+                      <a:solidFill>
+                        <a:srgbClr val="C0C0C0"/>
                       </a:solidFill>
                       <a:prstDash val="solid"/>
                       <a:round/>
                       <a:headEnd type="none" w="med" len="med"/>
                       <a:tailEnd type="none" w="med" len="med"/>
                     </a:lnB>
+                    <a:solidFill>
+                      <a:srgbClr val="FFFFFF"/>
+                    </a:solidFill>
                   </a:tcPr>
                 </a:tc>
                 <a:tc>
@@ -1859,60 +1202,84 @@
                         <a:buNone/>
                       </a:pPr>
                       <a:r>
-                        <a:rPr lang="en-US" sz="850" b="1" dirty="0">
-                          <a:solidFill>
-                            <a:srgbClr val="0C2340"/>
-                          </a:solidFill>
-                          <a:latin typeface="Calibri" pitchFamily="34" charset="0"/>
-                          <a:ea typeface="Calibri" pitchFamily="34" charset="-122"/>
-                          <a:cs typeface="Calibri" pitchFamily="34" charset="-120"/>
-                        </a:rPr>
-                        <a:t>2025</a:t>
-                      </a:r>
-                      <a:endParaRPr lang="en-US" sz="850" dirty="0">
+                        <a:rPr lang="en-US" sz="1100" b="1" dirty="0">
+                          <a:solidFill>
+                            <a:srgbClr val="000000"/>
+                          </a:solidFill>
+                          <a:latin typeface="Calibri" pitchFamily="34" charset="0"/>
+                          <a:ea typeface="Calibri" pitchFamily="34" charset="-122"/>
+                          <a:cs typeface="Calibri" pitchFamily="34" charset="-120"/>
+                        </a:rPr>
+                        <a:t>Blue</a:t>
+                      </a:r>
+                      <a:endParaRPr lang="en-US" sz="1100" dirty="0">
+                        <a:latin typeface="Calibri" charset="0"/>
+                        <a:ea typeface="Calibri" charset="0"/>
+                        <a:cs typeface="Calibri" charset="0"/>
+                      </a:endParaRPr>
+                    </a:p>
+                    <a:p>
+                      <a:pPr algn="ctr" indent="0" marL="0">
+                        <a:buNone/>
+                      </a:pPr>
+                      <a:r>
+                        <a:rPr lang="en-US" sz="1100" b="1" dirty="0">
+                          <a:solidFill>
+                            <a:srgbClr val="000000"/>
+                          </a:solidFill>
+                          <a:latin typeface="Calibri" pitchFamily="34" charset="0"/>
+                          <a:ea typeface="Calibri" pitchFamily="34" charset="-122"/>
+                          <a:cs typeface="Calibri" pitchFamily="34" charset="-120"/>
+                        </a:rPr>
+                        <a:t>H2</a:t>
+                      </a:r>
+                      <a:endParaRPr lang="en-US" sz="1100" dirty="0">
                         <a:latin typeface="Calibri" charset="0"/>
                         <a:ea typeface="Calibri" charset="0"/>
                         <a:cs typeface="Calibri" charset="0"/>
                       </a:endParaRPr>
                     </a:p>
                   </a:txBody>
-                  <a:tcPr marL="50800" marR="50800" marT="25400" marB="25400" anchor="ctr">
-                    <a:lnL w="0" cap="flat" cmpd="sng" algn="ctr">
-                      <a:solidFill>
-                        <a:srgbClr val="FFFFFF"/>
+                  <a:tcPr marL="91440" marR="91440" marT="45720" marB="45720" anchor="ctr">
+                    <a:lnL w="9525" cap="flat" cmpd="sng" algn="ctr">
+                      <a:solidFill>
+                        <a:srgbClr val="C0C0C0"/>
                       </a:solidFill>
                       <a:prstDash val="solid"/>
                       <a:round/>
                       <a:headEnd type="none" w="med" len="med"/>
                       <a:tailEnd type="none" w="med" len="med"/>
                     </a:lnL>
-                    <a:lnR w="0" cap="flat" cmpd="sng" algn="ctr">
-                      <a:solidFill>
-                        <a:srgbClr val="FFFFFF"/>
+                    <a:lnR w="9525" cap="flat" cmpd="sng" algn="ctr">
+                      <a:solidFill>
+                        <a:srgbClr val="C0C0C0"/>
                       </a:solidFill>
                       <a:prstDash val="solid"/>
                       <a:round/>
                       <a:headEnd type="none" w="med" len="med"/>
                       <a:tailEnd type="none" w="med" len="med"/>
                     </a:lnR>
-                    <a:lnT w="19050" cap="flat" cmpd="sng" algn="ctr">
-                      <a:solidFill>
-                        <a:srgbClr val="0C2340"/>
+                    <a:lnT w="9525" cap="flat" cmpd="sng" algn="ctr">
+                      <a:solidFill>
+                        <a:srgbClr val="C0C0C0"/>
                       </a:solidFill>
                       <a:prstDash val="solid"/>
                       <a:round/>
                       <a:headEnd type="none" w="med" len="med"/>
                       <a:tailEnd type="none" w="med" len="med"/>
                     </a:lnT>
-                    <a:lnB w="19050" cap="flat" cmpd="sng" algn="ctr">
-                      <a:solidFill>
-                        <a:srgbClr val="0C2340"/>
+                    <a:lnB w="9525" cap="flat" cmpd="sng" algn="ctr">
+                      <a:solidFill>
+                        <a:srgbClr val="C0C0C0"/>
                       </a:solidFill>
                       <a:prstDash val="solid"/>
                       <a:round/>
                       <a:headEnd type="none" w="med" len="med"/>
                       <a:tailEnd type="none" w="med" len="med"/>
                     </a:lnB>
+                    <a:solidFill>
+                      <a:srgbClr val="DCE9F5"/>
+                    </a:solidFill>
                   </a:tcPr>
                 </a:tc>
                 <a:tc>
@@ -1924,60 +1291,175 @@
                         <a:buNone/>
                       </a:pPr>
                       <a:r>
-                        <a:rPr lang="en-US" sz="850" b="1" dirty="0">
-                          <a:solidFill>
-                            <a:srgbClr val="0C2340"/>
-                          </a:solidFill>
-                          <a:latin typeface="Calibri" pitchFamily="34" charset="0"/>
-                          <a:ea typeface="Calibri" pitchFamily="34" charset="-122"/>
-                          <a:cs typeface="Calibri" pitchFamily="34" charset="-120"/>
-                        </a:rPr>
-                        <a:t>2028</a:t>
-                      </a:r>
-                      <a:endParaRPr lang="en-US" sz="850" dirty="0">
+                        <a:rPr lang="en-US" sz="1100" b="1" dirty="0">
+                          <a:solidFill>
+                            <a:srgbClr val="000000"/>
+                          </a:solidFill>
+                          <a:latin typeface="Calibri" pitchFamily="34" charset="0"/>
+                          <a:ea typeface="Calibri" pitchFamily="34" charset="-122"/>
+                          <a:cs typeface="Calibri" pitchFamily="34" charset="-120"/>
+                        </a:rPr>
+                        <a:t>Green</a:t>
+                      </a:r>
+                      <a:endParaRPr lang="en-US" sz="1100" dirty="0">
+                        <a:latin typeface="Calibri" charset="0"/>
+                        <a:ea typeface="Calibri" charset="0"/>
+                        <a:cs typeface="Calibri" charset="0"/>
+                      </a:endParaRPr>
+                    </a:p>
+                    <a:p>
+                      <a:pPr algn="ctr" indent="0" marL="0">
+                        <a:buNone/>
+                      </a:pPr>
+                      <a:r>
+                        <a:rPr lang="en-US" sz="1100" b="1" dirty="0">
+                          <a:solidFill>
+                            <a:srgbClr val="000000"/>
+                          </a:solidFill>
+                          <a:latin typeface="Calibri" pitchFamily="34" charset="0"/>
+                          <a:ea typeface="Calibri" pitchFamily="34" charset="-122"/>
+                          <a:cs typeface="Calibri" pitchFamily="34" charset="-120"/>
+                        </a:rPr>
+                        <a:t>H2</a:t>
+                      </a:r>
+                      <a:endParaRPr lang="en-US" sz="1100" dirty="0">
                         <a:latin typeface="Calibri" charset="0"/>
                         <a:ea typeface="Calibri" charset="0"/>
                         <a:cs typeface="Calibri" charset="0"/>
                       </a:endParaRPr>
                     </a:p>
                   </a:txBody>
-                  <a:tcPr marL="50800" marR="50800" marT="25400" marB="25400" anchor="ctr">
-                    <a:lnL w="0" cap="flat" cmpd="sng" algn="ctr">
-                      <a:solidFill>
-                        <a:srgbClr val="FFFFFF"/>
+                  <a:tcPr marL="91440" marR="91440" marT="45720" marB="45720" anchor="ctr">
+                    <a:lnL w="9525" cap="flat" cmpd="sng" algn="ctr">
+                      <a:solidFill>
+                        <a:srgbClr val="C0C0C0"/>
                       </a:solidFill>
                       <a:prstDash val="solid"/>
                       <a:round/>
                       <a:headEnd type="none" w="med" len="med"/>
                       <a:tailEnd type="none" w="med" len="med"/>
                     </a:lnL>
-                    <a:lnR w="0" cap="flat" cmpd="sng" algn="ctr">
-                      <a:solidFill>
-                        <a:srgbClr val="FFFFFF"/>
+                    <a:lnR w="9525" cap="flat" cmpd="sng" algn="ctr">
+                      <a:solidFill>
+                        <a:srgbClr val="C0C0C0"/>
                       </a:solidFill>
                       <a:prstDash val="solid"/>
                       <a:round/>
                       <a:headEnd type="none" w="med" len="med"/>
                       <a:tailEnd type="none" w="med" len="med"/>
                     </a:lnR>
-                    <a:lnT w="19050" cap="flat" cmpd="sng" algn="ctr">
-                      <a:solidFill>
-                        <a:srgbClr val="0C2340"/>
+                    <a:lnT w="9525" cap="flat" cmpd="sng" algn="ctr">
+                      <a:solidFill>
+                        <a:srgbClr val="C0C0C0"/>
                       </a:solidFill>
                       <a:prstDash val="solid"/>
                       <a:round/>
                       <a:headEnd type="none" w="med" len="med"/>
                       <a:tailEnd type="none" w="med" len="med"/>
                     </a:lnT>
-                    <a:lnB w="19050" cap="flat" cmpd="sng" algn="ctr">
-                      <a:solidFill>
-                        <a:srgbClr val="0C2340"/>
+                    <a:lnB w="9525" cap="flat" cmpd="sng" algn="ctr">
+                      <a:solidFill>
+                        <a:srgbClr val="C0C0C0"/>
                       </a:solidFill>
                       <a:prstDash val="solid"/>
                       <a:round/>
                       <a:headEnd type="none" w="med" len="med"/>
                       <a:tailEnd type="none" w="med" len="med"/>
                     </a:lnB>
+                    <a:solidFill>
+                      <a:srgbClr val="E8F6EF"/>
+                    </a:solidFill>
+                  </a:tcPr>
+                </a:tc>
+              </a:tr>
+              <a:tr h="457200">
+                <a:tc>
+                  <a:txBody>
+                    <a:bodyPr/>
+                    <a:lstStyle/>
+                    <a:p>
+                      <a:pPr indent="0" marL="0">
+                        <a:buNone/>
+                      </a:pPr>
+                      <a:r>
+                        <a:rPr lang="en-US" sz="1000" b="1" dirty="0">
+                          <a:solidFill>
+                            <a:srgbClr val="000000"/>
+                          </a:solidFill>
+                          <a:latin typeface="Calibri" pitchFamily="34" charset="0"/>
+                          <a:ea typeface="Calibri" pitchFamily="34" charset="-122"/>
+                          <a:cs typeface="Calibri" pitchFamily="34" charset="-120"/>
+                        </a:rPr>
+                        <a:t>Production</a:t>
+                      </a:r>
+                      <a:endParaRPr lang="en-US" sz="1000" dirty="0">
+                        <a:latin typeface="Calibri" charset="0"/>
+                        <a:ea typeface="Calibri" charset="0"/>
+                        <a:cs typeface="Calibri" charset="0"/>
+                      </a:endParaRPr>
+                    </a:p>
+                    <a:p>
+                      <a:pPr indent="0" marL="0">
+                        <a:buNone/>
+                      </a:pPr>
+                      <a:r>
+                        <a:rPr lang="en-US" sz="1000" b="1" dirty="0">
+                          <a:solidFill>
+                            <a:srgbClr val="000000"/>
+                          </a:solidFill>
+                          <a:latin typeface="Calibri" pitchFamily="34" charset="0"/>
+                          <a:ea typeface="Calibri" pitchFamily="34" charset="-122"/>
+                          <a:cs typeface="Calibri" pitchFamily="34" charset="-120"/>
+                        </a:rPr>
+                        <a:t>process</a:t>
+                      </a:r>
+                      <a:endParaRPr lang="en-US" sz="1000" dirty="0">
+                        <a:latin typeface="Calibri" charset="0"/>
+                        <a:ea typeface="Calibri" charset="0"/>
+                        <a:cs typeface="Calibri" charset="0"/>
+                      </a:endParaRPr>
+                    </a:p>
+                  </a:txBody>
+                  <a:tcPr marL="91440" marR="91440" marT="45720" marB="45720" anchor="ctr">
+                    <a:lnL w="9525" cap="flat" cmpd="sng" algn="ctr">
+                      <a:solidFill>
+                        <a:srgbClr val="C0C0C0"/>
+                      </a:solidFill>
+                      <a:prstDash val="solid"/>
+                      <a:round/>
+                      <a:headEnd type="none" w="med" len="med"/>
+                      <a:tailEnd type="none" w="med" len="med"/>
+                    </a:lnL>
+                    <a:lnR w="9525" cap="flat" cmpd="sng" algn="ctr">
+                      <a:solidFill>
+                        <a:srgbClr val="C0C0C0"/>
+                      </a:solidFill>
+                      <a:prstDash val="solid"/>
+                      <a:round/>
+                      <a:headEnd type="none" w="med" len="med"/>
+                      <a:tailEnd type="none" w="med" len="med"/>
+                    </a:lnR>
+                    <a:lnT w="9525" cap="flat" cmpd="sng" algn="ctr">
+                      <a:solidFill>
+                        <a:srgbClr val="C0C0C0"/>
+                      </a:solidFill>
+                      <a:prstDash val="solid"/>
+                      <a:round/>
+                      <a:headEnd type="none" w="med" len="med"/>
+                      <a:tailEnd type="none" w="med" len="med"/>
+                    </a:lnT>
+                    <a:lnB w="9525" cap="flat" cmpd="sng" algn="ctr">
+                      <a:solidFill>
+                        <a:srgbClr val="C0C0C0"/>
+                      </a:solidFill>
+                      <a:prstDash val="solid"/>
+                      <a:round/>
+                      <a:headEnd type="none" w="med" len="med"/>
+                      <a:tailEnd type="none" w="med" len="med"/>
+                    </a:lnB>
+                    <a:solidFill>
+                      <a:srgbClr val="FFFFFF"/>
+                    </a:solidFill>
                   </a:tcPr>
                 </a:tc>
                 <a:tc>
@@ -1985,64 +1467,88 @@
                     <a:bodyPr/>
                     <a:lstStyle/>
                     <a:p>
-                      <a:pPr algn="ctr" indent="0" marL="0">
-                        <a:buNone/>
-                      </a:pPr>
-                      <a:r>
-                        <a:rPr lang="en-US" sz="850" b="1" dirty="0">
-                          <a:solidFill>
-                            <a:srgbClr val="0C2340"/>
-                          </a:solidFill>
-                          <a:latin typeface="Calibri" pitchFamily="34" charset="0"/>
-                          <a:ea typeface="Calibri" pitchFamily="34" charset="-122"/>
-                          <a:cs typeface="Calibri" pitchFamily="34" charset="-120"/>
-                        </a:rPr>
-                        <a:t>2030</a:t>
-                      </a:r>
-                      <a:endParaRPr lang="en-US" sz="850" dirty="0">
+                      <a:pPr indent="0" marL="0">
+                        <a:buNone/>
+                      </a:pPr>
+                      <a:r>
+                        <a:rPr lang="en-US" sz="1000" dirty="0">
+                          <a:solidFill>
+                            <a:srgbClr val="333333"/>
+                          </a:solidFill>
+                          <a:latin typeface="Calibri" pitchFamily="34" charset="0"/>
+                          <a:ea typeface="Calibri" pitchFamily="34" charset="-122"/>
+                          <a:cs typeface="Calibri" pitchFamily="34" charset="-120"/>
+                        </a:rPr>
+                        <a:t>Split¹ natural gas</a:t>
+                      </a:r>
+                      <a:endParaRPr lang="en-US" sz="1000" dirty="0">
+                        <a:latin typeface="Calibri" charset="0"/>
+                        <a:ea typeface="Calibri" charset="0"/>
+                        <a:cs typeface="Calibri" charset="0"/>
+                      </a:endParaRPr>
+                    </a:p>
+                    <a:p>
+                      <a:pPr indent="0" marL="0">
+                        <a:buNone/>
+                      </a:pPr>
+                      <a:r>
+                        <a:rPr lang="en-US" sz="1000" dirty="0">
+                          <a:solidFill>
+                            <a:srgbClr val="333333"/>
+                          </a:solidFill>
+                          <a:latin typeface="Calibri" pitchFamily="34" charset="0"/>
+                          <a:ea typeface="Calibri" pitchFamily="34" charset="-122"/>
+                          <a:cs typeface="Calibri" pitchFamily="34" charset="-120"/>
+                        </a:rPr>
+                        <a:t>into H2 and CO2</a:t>
+                      </a:r>
+                      <a:endParaRPr lang="en-US" sz="1000" dirty="0">
                         <a:latin typeface="Calibri" charset="0"/>
                         <a:ea typeface="Calibri" charset="0"/>
                         <a:cs typeface="Calibri" charset="0"/>
                       </a:endParaRPr>
                     </a:p>
                   </a:txBody>
-                  <a:tcPr marL="50800" marR="50800" marT="25400" marB="25400" anchor="ctr">
-                    <a:lnL w="0" cap="flat" cmpd="sng" algn="ctr">
-                      <a:solidFill>
-                        <a:srgbClr val="FFFFFF"/>
+                  <a:tcPr marL="91440" marR="91440" marT="45720" marB="45720" anchor="ctr">
+                    <a:lnL w="9525" cap="flat" cmpd="sng" algn="ctr">
+                      <a:solidFill>
+                        <a:srgbClr val="C0C0C0"/>
                       </a:solidFill>
                       <a:prstDash val="solid"/>
                       <a:round/>
                       <a:headEnd type="none" w="med" len="med"/>
                       <a:tailEnd type="none" w="med" len="med"/>
                     </a:lnL>
-                    <a:lnR w="0" cap="flat" cmpd="sng" algn="ctr">
-                      <a:solidFill>
-                        <a:srgbClr val="FFFFFF"/>
+                    <a:lnR w="9525" cap="flat" cmpd="sng" algn="ctr">
+                      <a:solidFill>
+                        <a:srgbClr val="C0C0C0"/>
                       </a:solidFill>
                       <a:prstDash val="solid"/>
                       <a:round/>
                       <a:headEnd type="none" w="med" len="med"/>
                       <a:tailEnd type="none" w="med" len="med"/>
                     </a:lnR>
-                    <a:lnT w="19050" cap="flat" cmpd="sng" algn="ctr">
-                      <a:solidFill>
-                        <a:srgbClr val="0C2340"/>
+                    <a:lnT w="9525" cap="flat" cmpd="sng" algn="ctr">
+                      <a:solidFill>
+                        <a:srgbClr val="C0C0C0"/>
                       </a:solidFill>
                       <a:prstDash val="solid"/>
                       <a:round/>
                       <a:headEnd type="none" w="med" len="med"/>
                       <a:tailEnd type="none" w="med" len="med"/>
                     </a:lnT>
-                    <a:lnB w="19050" cap="flat" cmpd="sng" algn="ctr">
-                      <a:solidFill>
-                        <a:srgbClr val="0C2340"/>
+                    <a:lnB w="9525" cap="flat" cmpd="sng" algn="ctr">
+                      <a:solidFill>
+                        <a:srgbClr val="C0C0C0"/>
                       </a:solidFill>
                       <a:prstDash val="solid"/>
                       <a:round/>
                       <a:headEnd type="none" w="med" len="med"/>
                       <a:tailEnd type="none" w="med" len="med"/>
                     </a:lnB>
+                    <a:solidFill>
+                      <a:srgbClr val="FFFFFF"/>
+                    </a:solidFill>
                   </a:tcPr>
                 </a:tc>
                 <a:tc>
@@ -2050,131 +1556,109 @@
                     <a:bodyPr/>
                     <a:lstStyle/>
                     <a:p>
-                      <a:pPr algn="ctr" indent="0" marL="0">
-                        <a:buNone/>
-                      </a:pPr>
-                      <a:r>
-                        <a:rPr lang="en-US" sz="850" b="1" dirty="0">
-                          <a:solidFill>
-                            <a:srgbClr val="0C2340"/>
-                          </a:solidFill>
-                          <a:latin typeface="Calibri" pitchFamily="34" charset="0"/>
-                          <a:ea typeface="Calibri" pitchFamily="34" charset="-122"/>
-                          <a:cs typeface="Calibri" pitchFamily="34" charset="-120"/>
-                        </a:rPr>
-                        <a:t>2035</a:t>
-                      </a:r>
-                      <a:endParaRPr lang="en-US" sz="850" dirty="0">
+                      <a:pPr indent="0" marL="0">
+                        <a:buNone/>
+                      </a:pPr>
+                      <a:r>
+                        <a:rPr lang="en-US" sz="1000" dirty="0">
+                          <a:solidFill>
+                            <a:srgbClr val="333333"/>
+                          </a:solidFill>
+                          <a:latin typeface="Calibri" pitchFamily="34" charset="0"/>
+                          <a:ea typeface="Calibri" pitchFamily="34" charset="-122"/>
+                          <a:cs typeface="Calibri" pitchFamily="34" charset="-120"/>
+                        </a:rPr>
+                        <a:t>Similar to Grey but additionally</a:t>
+                      </a:r>
+                      <a:endParaRPr lang="en-US" sz="1000" dirty="0">
+                        <a:latin typeface="Calibri" charset="0"/>
+                        <a:ea typeface="Calibri" charset="0"/>
+                        <a:cs typeface="Calibri" charset="0"/>
+                      </a:endParaRPr>
+                    </a:p>
+                    <a:p>
+                      <a:pPr indent="0" marL="0">
+                        <a:buNone/>
+                      </a:pPr>
+                      <a:r>
+                        <a:rPr lang="en-US" sz="1000" dirty="0">
+                          <a:solidFill>
+                            <a:srgbClr val="333333"/>
+                          </a:solidFill>
+                          <a:latin typeface="Calibri" pitchFamily="34" charset="0"/>
+                          <a:ea typeface="Calibri" pitchFamily="34" charset="-122"/>
+                          <a:cs typeface="Calibri" pitchFamily="34" charset="-120"/>
+                        </a:rPr>
+                        <a:t>capture, potentially use, and</a:t>
+                      </a:r>
+                      <a:endParaRPr lang="en-US" sz="1000" dirty="0">
+                        <a:latin typeface="Calibri" charset="0"/>
+                        <a:ea typeface="Calibri" charset="0"/>
+                        <a:cs typeface="Calibri" charset="0"/>
+                      </a:endParaRPr>
+                    </a:p>
+                    <a:p>
+                      <a:pPr indent="0" marL="0">
+                        <a:buNone/>
+                      </a:pPr>
+                      <a:r>
+                        <a:rPr lang="en-US" sz="1000" dirty="0">
+                          <a:solidFill>
+                            <a:srgbClr val="333333"/>
+                          </a:solidFill>
+                          <a:latin typeface="Calibri" pitchFamily="34" charset="0"/>
+                          <a:ea typeface="Calibri" pitchFamily="34" charset="-122"/>
+                          <a:cs typeface="Calibri" pitchFamily="34" charset="-120"/>
+                        </a:rPr>
+                        <a:t>store CO2</a:t>
+                      </a:r>
+                      <a:endParaRPr lang="en-US" sz="1000" dirty="0">
                         <a:latin typeface="Calibri" charset="0"/>
                         <a:ea typeface="Calibri" charset="0"/>
                         <a:cs typeface="Calibri" charset="0"/>
                       </a:endParaRPr>
                     </a:p>
                   </a:txBody>
-                  <a:tcPr marL="50800" marR="50800" marT="25400" marB="25400" anchor="ctr">
-                    <a:lnL w="0" cap="flat" cmpd="sng" algn="ctr">
-                      <a:solidFill>
-                        <a:srgbClr val="FFFFFF"/>
+                  <a:tcPr marL="91440" marR="91440" marT="45720" marB="45720" anchor="ctr">
+                    <a:lnL w="9525" cap="flat" cmpd="sng" algn="ctr">
+                      <a:solidFill>
+                        <a:srgbClr val="C0C0C0"/>
                       </a:solidFill>
                       <a:prstDash val="solid"/>
                       <a:round/>
                       <a:headEnd type="none" w="med" len="med"/>
                       <a:tailEnd type="none" w="med" len="med"/>
                     </a:lnL>
-                    <a:lnR w="0" cap="flat" cmpd="sng" algn="ctr">
-                      <a:solidFill>
-                        <a:srgbClr val="FFFFFF"/>
+                    <a:lnR w="9525" cap="flat" cmpd="sng" algn="ctr">
+                      <a:solidFill>
+                        <a:srgbClr val="C0C0C0"/>
                       </a:solidFill>
                       <a:prstDash val="solid"/>
                       <a:round/>
                       <a:headEnd type="none" w="med" len="med"/>
                       <a:tailEnd type="none" w="med" len="med"/>
                     </a:lnR>
-                    <a:lnT w="19050" cap="flat" cmpd="sng" algn="ctr">
-                      <a:solidFill>
-                        <a:srgbClr val="0C2340"/>
+                    <a:lnT w="9525" cap="flat" cmpd="sng" algn="ctr">
+                      <a:solidFill>
+                        <a:srgbClr val="C0C0C0"/>
                       </a:solidFill>
                       <a:prstDash val="solid"/>
                       <a:round/>
                       <a:headEnd type="none" w="med" len="med"/>
                       <a:tailEnd type="none" w="med" len="med"/>
                     </a:lnT>
-                    <a:lnB w="19050" cap="flat" cmpd="sng" algn="ctr">
-                      <a:solidFill>
-                        <a:srgbClr val="0C2340"/>
+                    <a:lnB w="9525" cap="flat" cmpd="sng" algn="ctr">
+                      <a:solidFill>
+                        <a:srgbClr val="C0C0C0"/>
                       </a:solidFill>
                       <a:prstDash val="solid"/>
                       <a:round/>
                       <a:headEnd type="none" w="med" len="med"/>
                       <a:tailEnd type="none" w="med" len="med"/>
                     </a:lnB>
-                  </a:tcPr>
-                </a:tc>
-              </a:tr>
-              <a:tr h="256032">
-                <a:tc>
-                  <a:txBody>
-                    <a:bodyPr/>
-                    <a:lstStyle/>
-                    <a:p>
-                      <a:pPr algn="l" indent="0" marL="0">
-                        <a:buNone/>
-                      </a:pPr>
-                      <a:r>
-                        <a:rPr lang="en-US" sz="850" b="1" dirty="0">
-                          <a:solidFill>
-                            <a:srgbClr val="333333"/>
-                          </a:solidFill>
-                          <a:latin typeface="Calibri" pitchFamily="34" charset="0"/>
-                          <a:ea typeface="Calibri" pitchFamily="34" charset="-122"/>
-                          <a:cs typeface="Calibri" pitchFamily="34" charset="-120"/>
-                        </a:rPr>
-                        <a:t>Electrolyzer Capacity (GW)</a:t>
-                      </a:r>
-                      <a:endParaRPr lang="en-US" sz="850" dirty="0">
-                        <a:latin typeface="Calibri" charset="0"/>
-                        <a:ea typeface="Calibri" charset="0"/>
-                        <a:cs typeface="Calibri" charset="0"/>
-                      </a:endParaRPr>
-                    </a:p>
-                  </a:txBody>
-                  <a:tcPr marL="50800" marR="50800" marT="25400" marB="25400" anchor="ctr">
-                    <a:lnL w="0" cap="flat" cmpd="sng" algn="ctr">
-                      <a:solidFill>
-                        <a:srgbClr val="FFFFFF"/>
-                      </a:solidFill>
-                      <a:prstDash val="solid"/>
-                      <a:round/>
-                      <a:headEnd type="none" w="med" len="med"/>
-                      <a:tailEnd type="none" w="med" len="med"/>
-                    </a:lnL>
-                    <a:lnR w="0" cap="flat" cmpd="sng" algn="ctr">
-                      <a:solidFill>
-                        <a:srgbClr val="FFFFFF"/>
-                      </a:solidFill>
-                      <a:prstDash val="solid"/>
-                      <a:round/>
-                      <a:headEnd type="none" w="med" len="med"/>
-                      <a:tailEnd type="none" w="med" len="med"/>
-                    </a:lnR>
-                    <a:lnT w="0" cap="flat" cmpd="sng" algn="ctr">
-                      <a:solidFill>
-                        <a:srgbClr val="FFFFFF"/>
-                      </a:solidFill>
-                      <a:prstDash val="solid"/>
-                      <a:round/>
-                      <a:headEnd type="none" w="med" len="med"/>
-                      <a:tailEnd type="none" w="med" len="med"/>
-                    </a:lnT>
-                    <a:lnB w="6350" cap="flat" cmpd="sng" algn="ctr">
-                      <a:solidFill>
-                        <a:srgbClr val="E8E8E8"/>
-                      </a:solidFill>
-                      <a:prstDash val="solid"/>
-                      <a:round/>
-                      <a:headEnd type="none" w="med" len="med"/>
-                      <a:tailEnd type="none" w="med" len="med"/>
-                    </a:lnB>
+                    <a:solidFill>
+                      <a:srgbClr val="FFFFFF"/>
+                    </a:solidFill>
                   </a:tcPr>
                 </a:tc>
                 <a:tc>
@@ -2182,64 +1666,200 @@
                     <a:bodyPr/>
                     <a:lstStyle/>
                     <a:p>
-                      <a:pPr algn="ctr" indent="0" marL="0">
-                        <a:buNone/>
-                      </a:pPr>
-                      <a:r>
-                        <a:rPr lang="en-US" sz="800" dirty="0">
-                          <a:solidFill>
-                            <a:srgbClr val="404040"/>
-                          </a:solidFill>
-                          <a:latin typeface="Calibri" pitchFamily="34" charset="0"/>
-                          <a:ea typeface="Calibri" pitchFamily="34" charset="-122"/>
-                          <a:cs typeface="Calibri" pitchFamily="34" charset="-120"/>
-                        </a:rPr>
-                        <a:t>0.5</a:t>
-                      </a:r>
-                      <a:endParaRPr lang="en-US" sz="800" dirty="0">
+                      <a:pPr indent="0" marL="0">
+                        <a:buNone/>
+                      </a:pPr>
+                      <a:r>
+                        <a:rPr lang="en-US" sz="1000" dirty="0">
+                          <a:solidFill>
+                            <a:srgbClr val="333333"/>
+                          </a:solidFill>
+                          <a:latin typeface="Calibri" pitchFamily="34" charset="0"/>
+                          <a:ea typeface="Calibri" pitchFamily="34" charset="-122"/>
+                          <a:cs typeface="Calibri" pitchFamily="34" charset="-120"/>
+                        </a:rPr>
+                        <a:t>Split water into H2 and O2 in</a:t>
+                      </a:r>
+                      <a:endParaRPr lang="en-US" sz="1000" dirty="0">
+                        <a:latin typeface="Calibri" charset="0"/>
+                        <a:ea typeface="Calibri" charset="0"/>
+                        <a:cs typeface="Calibri" charset="0"/>
+                      </a:endParaRPr>
+                    </a:p>
+                    <a:p>
+                      <a:pPr indent="0" marL="0">
+                        <a:buNone/>
+                      </a:pPr>
+                      <a:r>
+                        <a:rPr lang="en-US" sz="1000" dirty="0">
+                          <a:solidFill>
+                            <a:srgbClr val="333333"/>
+                          </a:solidFill>
+                          <a:latin typeface="Calibri" pitchFamily="34" charset="0"/>
+                          <a:ea typeface="Calibri" pitchFamily="34" charset="-122"/>
+                          <a:cs typeface="Calibri" pitchFamily="34" charset="-120"/>
+                        </a:rPr>
+                        <a:t>an electrolyzer that is powered</a:t>
+                      </a:r>
+                      <a:endParaRPr lang="en-US" sz="1000" dirty="0">
+                        <a:latin typeface="Calibri" charset="0"/>
+                        <a:ea typeface="Calibri" charset="0"/>
+                        <a:cs typeface="Calibri" charset="0"/>
+                      </a:endParaRPr>
+                    </a:p>
+                    <a:p>
+                      <a:pPr indent="0" marL="0">
+                        <a:buNone/>
+                      </a:pPr>
+                      <a:r>
+                        <a:rPr lang="en-US" sz="1000" dirty="0">
+                          <a:solidFill>
+                            <a:srgbClr val="333333"/>
+                          </a:solidFill>
+                          <a:latin typeface="Calibri" pitchFamily="34" charset="0"/>
+                          <a:ea typeface="Calibri" pitchFamily="34" charset="-122"/>
+                          <a:cs typeface="Calibri" pitchFamily="34" charset="-120"/>
+                        </a:rPr>
+                        <a:t>by renewables</a:t>
+                      </a:r>
+                      <a:endParaRPr lang="en-US" sz="1000" dirty="0">
                         <a:latin typeface="Calibri" charset="0"/>
                         <a:ea typeface="Calibri" charset="0"/>
                         <a:cs typeface="Calibri" charset="0"/>
                       </a:endParaRPr>
                     </a:p>
                   </a:txBody>
-                  <a:tcPr marL="50800" marR="50800" marT="25400" marB="25400" anchor="ctr">
-                    <a:lnL w="0" cap="flat" cmpd="sng" algn="ctr">
-                      <a:solidFill>
-                        <a:srgbClr val="FFFFFF"/>
+                  <a:tcPr marL="91440" marR="91440" marT="45720" marB="45720" anchor="ctr">
+                    <a:lnL w="9525" cap="flat" cmpd="sng" algn="ctr">
+                      <a:solidFill>
+                        <a:srgbClr val="C0C0C0"/>
                       </a:solidFill>
                       <a:prstDash val="solid"/>
                       <a:round/>
                       <a:headEnd type="none" w="med" len="med"/>
                       <a:tailEnd type="none" w="med" len="med"/>
                     </a:lnL>
-                    <a:lnR w="0" cap="flat" cmpd="sng" algn="ctr">
-                      <a:solidFill>
-                        <a:srgbClr val="FFFFFF"/>
+                    <a:lnR w="9525" cap="flat" cmpd="sng" algn="ctr">
+                      <a:solidFill>
+                        <a:srgbClr val="C0C0C0"/>
                       </a:solidFill>
                       <a:prstDash val="solid"/>
                       <a:round/>
                       <a:headEnd type="none" w="med" len="med"/>
                       <a:tailEnd type="none" w="med" len="med"/>
                     </a:lnR>
-                    <a:lnT w="0" cap="flat" cmpd="sng" algn="ctr">
-                      <a:solidFill>
-                        <a:srgbClr val="FFFFFF"/>
+                    <a:lnT w="9525" cap="flat" cmpd="sng" algn="ctr">
+                      <a:solidFill>
+                        <a:srgbClr val="C0C0C0"/>
                       </a:solidFill>
                       <a:prstDash val="solid"/>
                       <a:round/>
                       <a:headEnd type="none" w="med" len="med"/>
                       <a:tailEnd type="none" w="med" len="med"/>
                     </a:lnT>
-                    <a:lnB w="6350" cap="flat" cmpd="sng" algn="ctr">
-                      <a:solidFill>
-                        <a:srgbClr val="E8E8E8"/>
+                    <a:lnB w="9525" cap="flat" cmpd="sng" algn="ctr">
+                      <a:solidFill>
+                        <a:srgbClr val="C0C0C0"/>
                       </a:solidFill>
                       <a:prstDash val="solid"/>
                       <a:round/>
                       <a:headEnd type="none" w="med" len="med"/>
                       <a:tailEnd type="none" w="med" len="med"/>
                     </a:lnB>
+                    <a:solidFill>
+                      <a:srgbClr val="FFFFFF"/>
+                    </a:solidFill>
+                  </a:tcPr>
+                </a:tc>
+              </a:tr>
+              <a:tr h="411480">
+                <a:tc>
+                  <a:txBody>
+                    <a:bodyPr/>
+                    <a:lstStyle/>
+                    <a:p>
+                      <a:pPr indent="0" marL="0">
+                        <a:buNone/>
+                      </a:pPr>
+                      <a:r>
+                        <a:rPr lang="en-US" sz="1000" b="1" dirty="0">
+                          <a:solidFill>
+                            <a:srgbClr val="000000"/>
+                          </a:solidFill>
+                          <a:latin typeface="Calibri" pitchFamily="34" charset="0"/>
+                          <a:ea typeface="Calibri" pitchFamily="34" charset="-122"/>
+                          <a:cs typeface="Calibri" pitchFamily="34" charset="-120"/>
+                        </a:rPr>
+                        <a:t>CO2 emissions</a:t>
+                      </a:r>
+                      <a:endParaRPr lang="en-US" sz="1000" dirty="0">
+                        <a:latin typeface="Calibri" charset="0"/>
+                        <a:ea typeface="Calibri" charset="0"/>
+                        <a:cs typeface="Calibri" charset="0"/>
+                      </a:endParaRPr>
+                    </a:p>
+                    <a:p>
+                      <a:pPr indent="0" marL="0">
+                        <a:buNone/>
+                      </a:pPr>
+                      <a:r>
+                        <a:rPr lang="en-US" sz="1000" b="1" dirty="0">
+                          <a:solidFill>
+                            <a:srgbClr val="000000"/>
+                          </a:solidFill>
+                          <a:latin typeface="Calibri" pitchFamily="34" charset="0"/>
+                          <a:ea typeface="Calibri" pitchFamily="34" charset="-122"/>
+                          <a:cs typeface="Calibri" pitchFamily="34" charset="-120"/>
+                        </a:rPr>
+                        <a:t>(kg CO2/kgH2)</a:t>
+                      </a:r>
+                      <a:endParaRPr lang="en-US" sz="1000" dirty="0">
+                        <a:latin typeface="Calibri" charset="0"/>
+                        <a:ea typeface="Calibri" charset="0"/>
+                        <a:cs typeface="Calibri" charset="0"/>
+                      </a:endParaRPr>
+                    </a:p>
+                  </a:txBody>
+                  <a:tcPr marL="91440" marR="91440" marT="45720" marB="45720" anchor="ctr">
+                    <a:lnL w="9525" cap="flat" cmpd="sng" algn="ctr">
+                      <a:solidFill>
+                        <a:srgbClr val="C0C0C0"/>
+                      </a:solidFill>
+                      <a:prstDash val="solid"/>
+                      <a:round/>
+                      <a:headEnd type="none" w="med" len="med"/>
+                      <a:tailEnd type="none" w="med" len="med"/>
+                    </a:lnL>
+                    <a:lnR w="9525" cap="flat" cmpd="sng" algn="ctr">
+                      <a:solidFill>
+                        <a:srgbClr val="C0C0C0"/>
+                      </a:solidFill>
+                      <a:prstDash val="solid"/>
+                      <a:round/>
+                      <a:headEnd type="none" w="med" len="med"/>
+                      <a:tailEnd type="none" w="med" len="med"/>
+                    </a:lnR>
+                    <a:lnT w="9525" cap="flat" cmpd="sng" algn="ctr">
+                      <a:solidFill>
+                        <a:srgbClr val="C0C0C0"/>
+                      </a:solidFill>
+                      <a:prstDash val="solid"/>
+                      <a:round/>
+                      <a:headEnd type="none" w="med" len="med"/>
+                      <a:tailEnd type="none" w="med" len="med"/>
+                    </a:lnT>
+                    <a:lnB w="9525" cap="flat" cmpd="sng" algn="ctr">
+                      <a:solidFill>
+                        <a:srgbClr val="C0C0C0"/>
+                      </a:solidFill>
+                      <a:prstDash val="solid"/>
+                      <a:round/>
+                      <a:headEnd type="none" w="med" len="med"/>
+                      <a:tailEnd type="none" w="med" len="med"/>
+                    </a:lnB>
+                    <a:solidFill>
+                      <a:srgbClr val="FFFFFF"/>
+                    </a:solidFill>
                   </a:tcPr>
                 </a:tc>
                 <a:tc>
@@ -2247,64 +1867,67 @@
                     <a:bodyPr/>
                     <a:lstStyle/>
                     <a:p>
-                      <a:pPr algn="ctr" indent="0" marL="0">
-                        <a:buNone/>
-                      </a:pPr>
-                      <a:r>
-                        <a:rPr lang="en-US" sz="800" dirty="0">
-                          <a:solidFill>
-                            <a:srgbClr val="404040"/>
-                          </a:solidFill>
-                          <a:latin typeface="Calibri" pitchFamily="34" charset="0"/>
-                          <a:ea typeface="Calibri" pitchFamily="34" charset="-122"/>
-                          <a:cs typeface="Calibri" pitchFamily="34" charset="-120"/>
-                        </a:rPr>
-                        <a:t>1.0</a:t>
-                      </a:r>
-                      <a:endParaRPr lang="en-US" sz="800" dirty="0">
+                      <a:pPr indent="0" marL="0">
+                        <a:buNone/>
+                      </a:pPr>
+                      <a:r>
+                        <a:rPr lang="en-US" sz="1000" dirty="0">
+                          <a:solidFill>
+                            <a:srgbClr val="333333"/>
+                          </a:solidFill>
+                          <a:latin typeface="Calibri" pitchFamily="34" charset="0"/>
+                          <a:ea typeface="Calibri" pitchFamily="34" charset="-122"/>
+                          <a:cs typeface="Calibri" pitchFamily="34" charset="-120"/>
+                        </a:rPr>
+                        <a:t>~10</a:t>
+                      </a:r>
+                      <a:endParaRPr lang="en-US" sz="1000" dirty="0">
                         <a:latin typeface="Calibri" charset="0"/>
                         <a:ea typeface="Calibri" charset="0"/>
                         <a:cs typeface="Calibri" charset="0"/>
                       </a:endParaRPr>
                     </a:p>
                   </a:txBody>
-                  <a:tcPr marL="50800" marR="50800" marT="25400" marB="25400" anchor="ctr">
-                    <a:lnL w="0" cap="flat" cmpd="sng" algn="ctr">
-                      <a:solidFill>
-                        <a:srgbClr val="FFFFFF"/>
+                  <a:tcPr marL="91440" marR="91440" marT="45720" marB="45720" anchor="ctr">
+                    <a:lnL w="9525" cap="flat" cmpd="sng" algn="ctr">
+                      <a:solidFill>
+                        <a:srgbClr val="C0C0C0"/>
                       </a:solidFill>
                       <a:prstDash val="solid"/>
                       <a:round/>
                       <a:headEnd type="none" w="med" len="med"/>
                       <a:tailEnd type="none" w="med" len="med"/>
                     </a:lnL>
-                    <a:lnR w="0" cap="flat" cmpd="sng" algn="ctr">
-                      <a:solidFill>
-                        <a:srgbClr val="FFFFFF"/>
+                    <a:lnR w="9525" cap="flat" cmpd="sng" algn="ctr">
+                      <a:solidFill>
+                        <a:srgbClr val="C0C0C0"/>
                       </a:solidFill>
                       <a:prstDash val="solid"/>
                       <a:round/>
                       <a:headEnd type="none" w="med" len="med"/>
                       <a:tailEnd type="none" w="med" len="med"/>
                     </a:lnR>
-                    <a:lnT w="0" cap="flat" cmpd="sng" algn="ctr">
-                      <a:solidFill>
-                        <a:srgbClr val="FFFFFF"/>
+                    <a:lnT w="9525" cap="flat" cmpd="sng" algn="ctr">
+                      <a:solidFill>
+                        <a:srgbClr val="C0C0C0"/>
                       </a:solidFill>
                       <a:prstDash val="solid"/>
                       <a:round/>
                       <a:headEnd type="none" w="med" len="med"/>
                       <a:tailEnd type="none" w="med" len="med"/>
                     </a:lnT>
-                    <a:lnB w="6350" cap="flat" cmpd="sng" algn="ctr">
-                      <a:solidFill>
-                        <a:srgbClr val="E8E8E8"/>
+                    <a:lnB w="9525" cap="flat" cmpd="sng" algn="ctr">
+                      <a:solidFill>
+                        <a:srgbClr val="C0C0C0"/>
                       </a:solidFill>
                       <a:prstDash val="solid"/>
                       <a:round/>
                       <a:headEnd type="none" w="med" len="med"/>
                       <a:tailEnd type="none" w="med" len="med"/>
                     </a:lnB>
+                    <a:solidFill>
+                      <a:srgbClr val="FFFFFF"/>
+                    </a:solidFill>
                   </a:tcPr>
                 </a:tc>
                 <a:tc>
@@ -2312,64 +1935,88 @@
                     <a:bodyPr/>
                     <a:lstStyle/>
                     <a:p>
-                      <a:pPr algn="ctr" indent="0" marL="0">
-                        <a:buNone/>
-                      </a:pPr>
-                      <a:r>
-                        <a:rPr lang="en-US" sz="800" dirty="0">
-                          <a:solidFill>
-                            <a:srgbClr val="404040"/>
-                          </a:solidFill>
-                          <a:latin typeface="Calibri" pitchFamily="34" charset="0"/>
-                          <a:ea typeface="Calibri" pitchFamily="34" charset="-122"/>
-                          <a:cs typeface="Calibri" pitchFamily="34" charset="-120"/>
-                        </a:rPr>
-                        <a:t>2.0</a:t>
-                      </a:r>
-                      <a:endParaRPr lang="en-US" sz="800" dirty="0">
+                      <a:pPr indent="0" marL="0">
+                        <a:buNone/>
+                      </a:pPr>
+                      <a:r>
+                        <a:rPr lang="en-US" sz="1000" dirty="0">
+                          <a:solidFill>
+                            <a:srgbClr val="333333"/>
+                          </a:solidFill>
+                          <a:latin typeface="Calibri" pitchFamily="34" charset="0"/>
+                          <a:ea typeface="Calibri" pitchFamily="34" charset="-122"/>
+                          <a:cs typeface="Calibri" pitchFamily="34" charset="-120"/>
+                        </a:rPr>
+                        <a:t>~1-3</a:t>
+                      </a:r>
+                      <a:endParaRPr lang="en-US" sz="1000" dirty="0">
+                        <a:latin typeface="Calibri" charset="0"/>
+                        <a:ea typeface="Calibri" charset="0"/>
+                        <a:cs typeface="Calibri" charset="0"/>
+                      </a:endParaRPr>
+                    </a:p>
+                    <a:p>
+                      <a:pPr indent="0" marL="0">
+                        <a:buNone/>
+                      </a:pPr>
+                      <a:r>
+                        <a:rPr lang="en-US" sz="1000" dirty="0">
+                          <a:solidFill>
+                            <a:srgbClr val="333333"/>
+                          </a:solidFill>
+                          <a:latin typeface="Calibri" pitchFamily="34" charset="0"/>
+                          <a:ea typeface="Calibri" pitchFamily="34" charset="-122"/>
+                          <a:cs typeface="Calibri" pitchFamily="34" charset="-120"/>
+                        </a:rPr>
+                        <a:t>Most CO2 stored</a:t>
+                      </a:r>
+                      <a:endParaRPr lang="en-US" sz="1000" dirty="0">
                         <a:latin typeface="Calibri" charset="0"/>
                         <a:ea typeface="Calibri" charset="0"/>
                         <a:cs typeface="Calibri" charset="0"/>
                       </a:endParaRPr>
                     </a:p>
                   </a:txBody>
-                  <a:tcPr marL="50800" marR="50800" marT="25400" marB="25400" anchor="ctr">
-                    <a:lnL w="0" cap="flat" cmpd="sng" algn="ctr">
-                      <a:solidFill>
-                        <a:srgbClr val="FFFFFF"/>
+                  <a:tcPr marL="91440" marR="91440" marT="45720" marB="45720" anchor="ctr">
+                    <a:lnL w="9525" cap="flat" cmpd="sng" algn="ctr">
+                      <a:solidFill>
+                        <a:srgbClr val="C0C0C0"/>
                       </a:solidFill>
                       <a:prstDash val="solid"/>
                       <a:round/>
                       <a:headEnd type="none" w="med" len="med"/>
                       <a:tailEnd type="none" w="med" len="med"/>
                     </a:lnL>
-                    <a:lnR w="0" cap="flat" cmpd="sng" algn="ctr">
-                      <a:solidFill>
-                        <a:srgbClr val="FFFFFF"/>
+                    <a:lnR w="9525" cap="flat" cmpd="sng" algn="ctr">
+                      <a:solidFill>
+                        <a:srgbClr val="C0C0C0"/>
                       </a:solidFill>
                       <a:prstDash val="solid"/>
                       <a:round/>
                       <a:headEnd type="none" w="med" len="med"/>
                       <a:tailEnd type="none" w="med" len="med"/>
                     </a:lnR>
-                    <a:lnT w="0" cap="flat" cmpd="sng" algn="ctr">
-                      <a:solidFill>
-                        <a:srgbClr val="FFFFFF"/>
+                    <a:lnT w="9525" cap="flat" cmpd="sng" algn="ctr">
+                      <a:solidFill>
+                        <a:srgbClr val="C0C0C0"/>
                       </a:solidFill>
                       <a:prstDash val="solid"/>
                       <a:round/>
                       <a:headEnd type="none" w="med" len="med"/>
                       <a:tailEnd type="none" w="med" len="med"/>
                     </a:lnT>
-                    <a:lnB w="6350" cap="flat" cmpd="sng" algn="ctr">
-                      <a:solidFill>
-                        <a:srgbClr val="E8E8E8"/>
+                    <a:lnB w="9525" cap="flat" cmpd="sng" algn="ctr">
+                      <a:solidFill>
+                        <a:srgbClr val="C0C0C0"/>
                       </a:solidFill>
                       <a:prstDash val="solid"/>
                       <a:round/>
                       <a:headEnd type="none" w="med" len="med"/>
                       <a:tailEnd type="none" w="med" len="med"/>
                     </a:lnB>
+                    <a:solidFill>
+                      <a:srgbClr val="FFFFFF"/>
+                    </a:solidFill>
                   </a:tcPr>
                 </a:tc>
                 <a:tc>
@@ -2377,64 +2024,179 @@
                     <a:bodyPr/>
                     <a:lstStyle/>
                     <a:p>
-                      <a:pPr algn="ctr" indent="0" marL="0">
-                        <a:buNone/>
-                      </a:pPr>
-                      <a:r>
-                        <a:rPr lang="en-US" sz="800" dirty="0">
-                          <a:solidFill>
-                            <a:srgbClr val="404040"/>
-                          </a:solidFill>
-                          <a:latin typeface="Calibri" pitchFamily="34" charset="0"/>
-                          <a:ea typeface="Calibri" pitchFamily="34" charset="-122"/>
-                          <a:cs typeface="Calibri" pitchFamily="34" charset="-120"/>
-                        </a:rPr>
-                        <a:t>3–4</a:t>
-                      </a:r>
-                      <a:endParaRPr lang="en-US" sz="800" dirty="0">
+                      <a:pPr indent="0" marL="0">
+                        <a:buNone/>
+                      </a:pPr>
+                      <a:r>
+                        <a:rPr lang="en-US" sz="1000" dirty="0">
+                          <a:solidFill>
+                            <a:srgbClr val="333333"/>
+                          </a:solidFill>
+                          <a:latin typeface="Calibri" pitchFamily="34" charset="0"/>
+                          <a:ea typeface="Calibri" pitchFamily="34" charset="-122"/>
+                          <a:cs typeface="Calibri" pitchFamily="34" charset="-120"/>
+                        </a:rPr>
+                        <a:t>~0</a:t>
+                      </a:r>
+                      <a:endParaRPr lang="en-US" sz="1000" dirty="0">
+                        <a:latin typeface="Calibri" charset="0"/>
+                        <a:ea typeface="Calibri" charset="0"/>
+                        <a:cs typeface="Calibri" charset="0"/>
+                      </a:endParaRPr>
+                    </a:p>
+                    <a:p>
+                      <a:pPr indent="0" marL="0">
+                        <a:buNone/>
+                      </a:pPr>
+                      <a:r>
+                        <a:rPr lang="en-US" sz="1000" dirty="0">
+                          <a:solidFill>
+                            <a:srgbClr val="333333"/>
+                          </a:solidFill>
+                          <a:latin typeface="Calibri" pitchFamily="34" charset="0"/>
+                          <a:ea typeface="Calibri" pitchFamily="34" charset="-122"/>
+                          <a:cs typeface="Calibri" pitchFamily="34" charset="-120"/>
+                        </a:rPr>
+                        <a:t>Assuming Green electricity mix²</a:t>
+                      </a:r>
+                      <a:endParaRPr lang="en-US" sz="1000" dirty="0">
                         <a:latin typeface="Calibri" charset="0"/>
                         <a:ea typeface="Calibri" charset="0"/>
                         <a:cs typeface="Calibri" charset="0"/>
                       </a:endParaRPr>
                     </a:p>
                   </a:txBody>
-                  <a:tcPr marL="50800" marR="50800" marT="25400" marB="25400" anchor="ctr">
-                    <a:lnL w="0" cap="flat" cmpd="sng" algn="ctr">
-                      <a:solidFill>
-                        <a:srgbClr val="FFFFFF"/>
+                  <a:tcPr marL="91440" marR="91440" marT="45720" marB="45720" anchor="ctr">
+                    <a:lnL w="9525" cap="flat" cmpd="sng" algn="ctr">
+                      <a:solidFill>
+                        <a:srgbClr val="C0C0C0"/>
                       </a:solidFill>
                       <a:prstDash val="solid"/>
                       <a:round/>
                       <a:headEnd type="none" w="med" len="med"/>
                       <a:tailEnd type="none" w="med" len="med"/>
                     </a:lnL>
-                    <a:lnR w="0" cap="flat" cmpd="sng" algn="ctr">
-                      <a:solidFill>
-                        <a:srgbClr val="FFFFFF"/>
+                    <a:lnR w="9525" cap="flat" cmpd="sng" algn="ctr">
+                      <a:solidFill>
+                        <a:srgbClr val="C0C0C0"/>
                       </a:solidFill>
                       <a:prstDash val="solid"/>
                       <a:round/>
                       <a:headEnd type="none" w="med" len="med"/>
                       <a:tailEnd type="none" w="med" len="med"/>
                     </a:lnR>
-                    <a:lnT w="0" cap="flat" cmpd="sng" algn="ctr">
-                      <a:solidFill>
-                        <a:srgbClr val="FFFFFF"/>
+                    <a:lnT w="9525" cap="flat" cmpd="sng" algn="ctr">
+                      <a:solidFill>
+                        <a:srgbClr val="C0C0C0"/>
                       </a:solidFill>
                       <a:prstDash val="solid"/>
                       <a:round/>
                       <a:headEnd type="none" w="med" len="med"/>
                       <a:tailEnd type="none" w="med" len="med"/>
                     </a:lnT>
-                    <a:lnB w="6350" cap="flat" cmpd="sng" algn="ctr">
-                      <a:solidFill>
-                        <a:srgbClr val="E8E8E8"/>
+                    <a:lnB w="9525" cap="flat" cmpd="sng" algn="ctr">
+                      <a:solidFill>
+                        <a:srgbClr val="C0C0C0"/>
                       </a:solidFill>
                       <a:prstDash val="solid"/>
                       <a:round/>
                       <a:headEnd type="none" w="med" len="med"/>
                       <a:tailEnd type="none" w="med" len="med"/>
                     </a:lnB>
+                    <a:solidFill>
+                      <a:srgbClr val="FFFFFF"/>
+                    </a:solidFill>
+                  </a:tcPr>
+                </a:tc>
+              </a:tr>
+              <a:tr h="777240">
+                <a:tc>
+                  <a:txBody>
+                    <a:bodyPr/>
+                    <a:lstStyle/>
+                    <a:p>
+                      <a:pPr indent="0" marL="0">
+                        <a:buNone/>
+                      </a:pPr>
+                      <a:r>
+                        <a:rPr lang="en-US" sz="1000" b="1" dirty="0">
+                          <a:solidFill>
+                            <a:srgbClr val="000000"/>
+                          </a:solidFill>
+                          <a:latin typeface="Calibri" pitchFamily="34" charset="0"/>
+                          <a:ea typeface="Calibri" pitchFamily="34" charset="-122"/>
+                          <a:cs typeface="Calibri" pitchFamily="34" charset="-120"/>
+                        </a:rPr>
+                        <a:t>Investments</a:t>
+                      </a:r>
+                      <a:endParaRPr lang="en-US" sz="1000" dirty="0">
+                        <a:latin typeface="Calibri" charset="0"/>
+                        <a:ea typeface="Calibri" charset="0"/>
+                        <a:cs typeface="Calibri" charset="0"/>
+                      </a:endParaRPr>
+                    </a:p>
+                    <a:p>
+                      <a:pPr indent="0" marL="0">
+                        <a:buNone/>
+                      </a:pPr>
+                      <a:r>
+                        <a:rPr lang="en-US" sz="1000" b="1" dirty="0">
+                          <a:solidFill>
+                            <a:srgbClr val="000000"/>
+                          </a:solidFill>
+                          <a:latin typeface="Calibri" pitchFamily="34" charset="0"/>
+                          <a:ea typeface="Calibri" pitchFamily="34" charset="-122"/>
+                          <a:cs typeface="Calibri" pitchFamily="34" charset="-120"/>
+                        </a:rPr>
+                        <a:t>and complexity</a:t>
+                      </a:r>
+                      <a:endParaRPr lang="en-US" sz="1000" dirty="0">
+                        <a:latin typeface="Calibri" charset="0"/>
+                        <a:ea typeface="Calibri" charset="0"/>
+                        <a:cs typeface="Calibri" charset="0"/>
+                      </a:endParaRPr>
+                    </a:p>
+                  </a:txBody>
+                  <a:tcPr marL="91440" marR="91440" marT="45720" marB="45720" anchor="ctr">
+                    <a:lnL w="9525" cap="flat" cmpd="sng" algn="ctr">
+                      <a:solidFill>
+                        <a:srgbClr val="C0C0C0"/>
+                      </a:solidFill>
+                      <a:prstDash val="solid"/>
+                      <a:round/>
+                      <a:headEnd type="none" w="med" len="med"/>
+                      <a:tailEnd type="none" w="med" len="med"/>
+                    </a:lnL>
+                    <a:lnR w="9525" cap="flat" cmpd="sng" algn="ctr">
+                      <a:solidFill>
+                        <a:srgbClr val="C0C0C0"/>
+                      </a:solidFill>
+                      <a:prstDash val="solid"/>
+                      <a:round/>
+                      <a:headEnd type="none" w="med" len="med"/>
+                      <a:tailEnd type="none" w="med" len="med"/>
+                    </a:lnR>
+                    <a:lnT w="9525" cap="flat" cmpd="sng" algn="ctr">
+                      <a:solidFill>
+                        <a:srgbClr val="C0C0C0"/>
+                      </a:solidFill>
+                      <a:prstDash val="solid"/>
+                      <a:round/>
+                      <a:headEnd type="none" w="med" len="med"/>
+                      <a:tailEnd type="none" w="med" len="med"/>
+                    </a:lnT>
+                    <a:lnB w="9525" cap="flat" cmpd="sng" algn="ctr">
+                      <a:solidFill>
+                        <a:srgbClr val="C0C0C0"/>
+                      </a:solidFill>
+                      <a:prstDash val="solid"/>
+                      <a:round/>
+                      <a:headEnd type="none" w="med" len="med"/>
+                      <a:tailEnd type="none" w="med" len="med"/>
+                    </a:lnB>
+                    <a:solidFill>
+                      <a:srgbClr val="FFFFFF"/>
+                    </a:solidFill>
                   </a:tcPr>
                 </a:tc>
                 <a:tc>
@@ -2442,131 +2204,119 @@
                     <a:bodyPr/>
                     <a:lstStyle/>
                     <a:p>
-                      <a:pPr algn="ctr" indent="0" marL="0">
-                        <a:buNone/>
-                      </a:pPr>
-                      <a:r>
-                        <a:rPr lang="en-US" sz="800" dirty="0">
-                          <a:solidFill>
-                            <a:srgbClr val="404040"/>
-                          </a:solidFill>
-                          <a:latin typeface="Calibri" pitchFamily="34" charset="0"/>
-                          <a:ea typeface="Calibri" pitchFamily="34" charset="-122"/>
-                          <a:cs typeface="Calibri" pitchFamily="34" charset="-120"/>
-                        </a:rPr>
-                        <a:t>6–8</a:t>
-                      </a:r>
-                      <a:endParaRPr lang="en-US" sz="800" dirty="0">
+                      <a:pPr indent="0" marL="0">
+                        <a:buNone/>
+                      </a:pPr>
+                      <a:r>
+                        <a:rPr lang="en-US" sz="1000" dirty="0">
+                          <a:solidFill>
+                            <a:srgbClr val="333333"/>
+                          </a:solidFill>
+                          <a:latin typeface="Calibri" pitchFamily="34" charset="0"/>
+                          <a:ea typeface="Calibri" pitchFamily="34" charset="-122"/>
+                          <a:cs typeface="Calibri" pitchFamily="34" charset="-120"/>
+                        </a:rPr>
+                        <a:t>Large scale, one-off facilities</a:t>
+                      </a:r>
+                      <a:endParaRPr lang="en-US" sz="1000" dirty="0">
+                        <a:latin typeface="Calibri" charset="0"/>
+                        <a:ea typeface="Calibri" charset="0"/>
+                        <a:cs typeface="Calibri" charset="0"/>
+                      </a:endParaRPr>
+                    </a:p>
+                    <a:p>
+                      <a:pPr indent="0" marL="0">
+                        <a:buNone/>
+                      </a:pPr>
+                      <a:endParaRPr lang="en-US" sz="1000" dirty="0">
+                        <a:latin typeface="Calibri" charset="0"/>
+                        <a:ea typeface="Calibri" charset="0"/>
+                        <a:cs typeface="Calibri" charset="0"/>
+                      </a:endParaRPr>
+                    </a:p>
+                    <a:p>
+                      <a:pPr indent="0" marL="0">
+                        <a:buNone/>
+                      </a:pPr>
+                      <a:r>
+                        <a:rPr lang="en-US" sz="1000" dirty="0">
+                          <a:solidFill>
+                            <a:srgbClr val="333333"/>
+                          </a:solidFill>
+                          <a:latin typeface="Calibri" pitchFamily="34" charset="0"/>
+                          <a:ea typeface="Calibri" pitchFamily="34" charset="-122"/>
+                          <a:cs typeface="Calibri" pitchFamily="34" charset="-120"/>
+                        </a:rPr>
+                        <a:t>Requiring triple-digit million</a:t>
+                      </a:r>
+                      <a:endParaRPr lang="en-US" sz="1000" dirty="0">
+                        <a:latin typeface="Calibri" charset="0"/>
+                        <a:ea typeface="Calibri" charset="0"/>
+                        <a:cs typeface="Calibri" charset="0"/>
+                      </a:endParaRPr>
+                    </a:p>
+                    <a:p>
+                      <a:pPr indent="0" marL="0">
+                        <a:buNone/>
+                      </a:pPr>
+                      <a:r>
+                        <a:rPr lang="en-US" sz="1000" dirty="0">
+                          <a:solidFill>
+                            <a:srgbClr val="333333"/>
+                          </a:solidFill>
+                          <a:latin typeface="Calibri" pitchFamily="34" charset="0"/>
+                          <a:ea typeface="Calibri" pitchFamily="34" charset="-122"/>
+                          <a:cs typeface="Calibri" pitchFamily="34" charset="-120"/>
+                        </a:rPr>
+                        <a:t>EUR CAPEX per facility</a:t>
+                      </a:r>
+                      <a:endParaRPr lang="en-US" sz="1000" dirty="0">
                         <a:latin typeface="Calibri" charset="0"/>
                         <a:ea typeface="Calibri" charset="0"/>
                         <a:cs typeface="Calibri" charset="0"/>
                       </a:endParaRPr>
                     </a:p>
                   </a:txBody>
-                  <a:tcPr marL="50800" marR="50800" marT="25400" marB="25400" anchor="ctr">
-                    <a:lnL w="0" cap="flat" cmpd="sng" algn="ctr">
-                      <a:solidFill>
-                        <a:srgbClr val="FFFFFF"/>
+                  <a:tcPr marL="91440" marR="91440" marT="45720" marB="45720" anchor="ctr">
+                    <a:lnL w="9525" cap="flat" cmpd="sng" algn="ctr">
+                      <a:solidFill>
+                        <a:srgbClr val="C0C0C0"/>
                       </a:solidFill>
                       <a:prstDash val="solid"/>
                       <a:round/>
                       <a:headEnd type="none" w="med" len="med"/>
                       <a:tailEnd type="none" w="med" len="med"/>
                     </a:lnL>
-                    <a:lnR w="0" cap="flat" cmpd="sng" algn="ctr">
-                      <a:solidFill>
-                        <a:srgbClr val="FFFFFF"/>
+                    <a:lnR w="9525" cap="flat" cmpd="sng" algn="ctr">
+                      <a:solidFill>
+                        <a:srgbClr val="C0C0C0"/>
                       </a:solidFill>
                       <a:prstDash val="solid"/>
                       <a:round/>
                       <a:headEnd type="none" w="med" len="med"/>
                       <a:tailEnd type="none" w="med" len="med"/>
                     </a:lnR>
-                    <a:lnT w="0" cap="flat" cmpd="sng" algn="ctr">
-                      <a:solidFill>
-                        <a:srgbClr val="FFFFFF"/>
+                    <a:lnT w="9525" cap="flat" cmpd="sng" algn="ctr">
+                      <a:solidFill>
+                        <a:srgbClr val="C0C0C0"/>
                       </a:solidFill>
                       <a:prstDash val="solid"/>
                       <a:round/>
                       <a:headEnd type="none" w="med" len="med"/>
                       <a:tailEnd type="none" w="med" len="med"/>
                     </a:lnT>
-                    <a:lnB w="6350" cap="flat" cmpd="sng" algn="ctr">
-                      <a:solidFill>
-                        <a:srgbClr val="E8E8E8"/>
+                    <a:lnB w="9525" cap="flat" cmpd="sng" algn="ctr">
+                      <a:solidFill>
+                        <a:srgbClr val="C0C0C0"/>
                       </a:solidFill>
                       <a:prstDash val="solid"/>
                       <a:round/>
                       <a:headEnd type="none" w="med" len="med"/>
                       <a:tailEnd type="none" w="med" len="med"/>
                     </a:lnB>
-                  </a:tcPr>
-                </a:tc>
-              </a:tr>
-              <a:tr h="256032">
-                <a:tc>
-                  <a:txBody>
-                    <a:bodyPr/>
-                    <a:lstStyle/>
-                    <a:p>
-                      <a:pPr algn="l" indent="0" marL="0">
-                        <a:buNone/>
-                      </a:pPr>
-                      <a:r>
-                        <a:rPr lang="en-US" sz="850" b="1" dirty="0">
-                          <a:solidFill>
-                            <a:srgbClr val="333333"/>
-                          </a:solidFill>
-                          <a:latin typeface="Calibri" pitchFamily="34" charset="0"/>
-                          <a:ea typeface="Calibri" pitchFamily="34" charset="-122"/>
-                          <a:cs typeface="Calibri" pitchFamily="34" charset="-120"/>
-                        </a:rPr>
-                        <a:t>Green H₂ Cost (€/kg)</a:t>
-                      </a:r>
-                      <a:endParaRPr lang="en-US" sz="850" dirty="0">
-                        <a:latin typeface="Calibri" charset="0"/>
-                        <a:ea typeface="Calibri" charset="0"/>
-                        <a:cs typeface="Calibri" charset="0"/>
-                      </a:endParaRPr>
-                    </a:p>
-                  </a:txBody>
-                  <a:tcPr marL="50800" marR="50800" marT="25400" marB="25400" anchor="ctr">
-                    <a:lnL w="0" cap="flat" cmpd="sng" algn="ctr">
-                      <a:solidFill>
-                        <a:srgbClr val="FFFFFF"/>
-                      </a:solidFill>
-                      <a:prstDash val="solid"/>
-                      <a:round/>
-                      <a:headEnd type="none" w="med" len="med"/>
-                      <a:tailEnd type="none" w="med" len="med"/>
-                    </a:lnL>
-                    <a:lnR w="0" cap="flat" cmpd="sng" algn="ctr">
-                      <a:solidFill>
-                        <a:srgbClr val="FFFFFF"/>
-                      </a:solidFill>
-                      <a:prstDash val="solid"/>
-                      <a:round/>
-                      <a:headEnd type="none" w="med" len="med"/>
-                      <a:tailEnd type="none" w="med" len="med"/>
-                    </a:lnR>
-                    <a:lnT w="0" cap="flat" cmpd="sng" algn="ctr">
-                      <a:solidFill>
-                        <a:srgbClr val="FFFFFF"/>
-                      </a:solidFill>
-                      <a:prstDash val="solid"/>
-                      <a:round/>
-                      <a:headEnd type="none" w="med" len="med"/>
-                      <a:tailEnd type="none" w="med" len="med"/>
-                    </a:lnT>
-                    <a:lnB w="6350" cap="flat" cmpd="sng" algn="ctr">
-                      <a:solidFill>
-                        <a:srgbClr val="E8E8E8"/>
-                      </a:solidFill>
-                      <a:prstDash val="solid"/>
-                      <a:round/>
-                      <a:headEnd type="none" w="med" len="med"/>
-                      <a:tailEnd type="none" w="med" len="med"/>
-                    </a:lnB>
+                    <a:solidFill>
+                      <a:srgbClr val="FFFFFF"/>
+                    </a:solidFill>
                   </a:tcPr>
                 </a:tc>
                 <a:tc>
@@ -2574,64 +2324,119 @@
                     <a:bodyPr/>
                     <a:lstStyle/>
                     <a:p>
-                      <a:pPr algn="ctr" indent="0" marL="0">
-                        <a:buNone/>
-                      </a:pPr>
-                      <a:r>
-                        <a:rPr lang="en-US" sz="800" dirty="0">
-                          <a:solidFill>
-                            <a:srgbClr val="404040"/>
-                          </a:solidFill>
-                          <a:latin typeface="Calibri" pitchFamily="34" charset="0"/>
-                          <a:ea typeface="Calibri" pitchFamily="34" charset="-122"/>
-                          <a:cs typeface="Calibri" pitchFamily="34" charset="-120"/>
-                        </a:rPr>
-                        <a:t>6.0</a:t>
-                      </a:r>
-                      <a:endParaRPr lang="en-US" sz="800" dirty="0">
+                      <a:pPr indent="0" marL="0">
+                        <a:buNone/>
+                      </a:pPr>
+                      <a:r>
+                        <a:rPr lang="en-US" sz="1000" dirty="0">
+                          <a:solidFill>
+                            <a:srgbClr val="333333"/>
+                          </a:solidFill>
+                          <a:latin typeface="Calibri" pitchFamily="34" charset="0"/>
+                          <a:ea typeface="Calibri" pitchFamily="34" charset="-122"/>
+                          <a:cs typeface="Calibri" pitchFamily="34" charset="-120"/>
+                        </a:rPr>
+                        <a:t>Large scale and one-off facilities</a:t>
+                      </a:r>
+                      <a:endParaRPr lang="en-US" sz="1000" dirty="0">
+                        <a:latin typeface="Calibri" charset="0"/>
+                        <a:ea typeface="Calibri" charset="0"/>
+                        <a:cs typeface="Calibri" charset="0"/>
+                      </a:endParaRPr>
+                    </a:p>
+                    <a:p>
+                      <a:pPr indent="0" marL="0">
+                        <a:buNone/>
+                      </a:pPr>
+                      <a:endParaRPr lang="en-US" sz="1000" dirty="0">
+                        <a:latin typeface="Calibri" charset="0"/>
+                        <a:ea typeface="Calibri" charset="0"/>
+                        <a:cs typeface="Calibri" charset="0"/>
+                      </a:endParaRPr>
+                    </a:p>
+                    <a:p>
+                      <a:pPr indent="0" marL="0">
+                        <a:buNone/>
+                      </a:pPr>
+                      <a:r>
+                        <a:rPr lang="en-US" sz="1000" dirty="0">
+                          <a:solidFill>
+                            <a:srgbClr val="333333"/>
+                          </a:solidFill>
+                          <a:latin typeface="Calibri" pitchFamily="34" charset="0"/>
+                          <a:ea typeface="Calibri" pitchFamily="34" charset="-122"/>
+                          <a:cs typeface="Calibri" pitchFamily="34" charset="-120"/>
+                        </a:rPr>
+                        <a:t>Requiring triple-digit mn EUR</a:t>
+                      </a:r>
+                      <a:endParaRPr lang="en-US" sz="1000" dirty="0">
+                        <a:latin typeface="Calibri" charset="0"/>
+                        <a:ea typeface="Calibri" charset="0"/>
+                        <a:cs typeface="Calibri" charset="0"/>
+                      </a:endParaRPr>
+                    </a:p>
+                    <a:p>
+                      <a:pPr indent="0" marL="0">
+                        <a:buNone/>
+                      </a:pPr>
+                      <a:r>
+                        <a:rPr lang="en-US" sz="1000" dirty="0">
+                          <a:solidFill>
+                            <a:srgbClr val="333333"/>
+                          </a:solidFill>
+                          <a:latin typeface="Calibri" pitchFamily="34" charset="0"/>
+                          <a:ea typeface="Calibri" pitchFamily="34" charset="-122"/>
+                          <a:cs typeface="Calibri" pitchFamily="34" charset="-120"/>
+                        </a:rPr>
+                        <a:t>CAPEX per facility</a:t>
+                      </a:r>
+                      <a:endParaRPr lang="en-US" sz="1000" dirty="0">
                         <a:latin typeface="Calibri" charset="0"/>
                         <a:ea typeface="Calibri" charset="0"/>
                         <a:cs typeface="Calibri" charset="0"/>
                       </a:endParaRPr>
                     </a:p>
                   </a:txBody>
-                  <a:tcPr marL="50800" marR="50800" marT="25400" marB="25400" anchor="ctr">
-                    <a:lnL w="0" cap="flat" cmpd="sng" algn="ctr">
-                      <a:solidFill>
-                        <a:srgbClr val="FFFFFF"/>
+                  <a:tcPr marL="91440" marR="91440" marT="45720" marB="45720" anchor="ctr">
+                    <a:lnL w="9525" cap="flat" cmpd="sng" algn="ctr">
+                      <a:solidFill>
+                        <a:srgbClr val="C0C0C0"/>
                       </a:solidFill>
                       <a:prstDash val="solid"/>
                       <a:round/>
                       <a:headEnd type="none" w="med" len="med"/>
                       <a:tailEnd type="none" w="med" len="med"/>
                     </a:lnL>
-                    <a:lnR w="0" cap="flat" cmpd="sng" algn="ctr">
-                      <a:solidFill>
-                        <a:srgbClr val="FFFFFF"/>
+                    <a:lnR w="9525" cap="flat" cmpd="sng" algn="ctr">
+                      <a:solidFill>
+                        <a:srgbClr val="C0C0C0"/>
                       </a:solidFill>
                       <a:prstDash val="solid"/>
                       <a:round/>
                       <a:headEnd type="none" w="med" len="med"/>
                       <a:tailEnd type="none" w="med" len="med"/>
                     </a:lnR>
-                    <a:lnT w="0" cap="flat" cmpd="sng" algn="ctr">
-                      <a:solidFill>
-                        <a:srgbClr val="FFFFFF"/>
+                    <a:lnT w="9525" cap="flat" cmpd="sng" algn="ctr">
+                      <a:solidFill>
+                        <a:srgbClr val="C0C0C0"/>
                       </a:solidFill>
                       <a:prstDash val="solid"/>
                       <a:round/>
                       <a:headEnd type="none" w="med" len="med"/>
                       <a:tailEnd type="none" w="med" len="med"/>
                     </a:lnT>
-                    <a:lnB w="6350" cap="flat" cmpd="sng" algn="ctr">
-                      <a:solidFill>
-                        <a:srgbClr val="E8E8E8"/>
+                    <a:lnB w="9525" cap="flat" cmpd="sng" algn="ctr">
+                      <a:solidFill>
+                        <a:srgbClr val="C0C0C0"/>
                       </a:solidFill>
                       <a:prstDash val="solid"/>
                       <a:round/>
                       <a:headEnd type="none" w="med" len="med"/>
                       <a:tailEnd type="none" w="med" len="med"/>
                     </a:lnB>
+                    <a:solidFill>
+                      <a:srgbClr val="FFFFFF"/>
+                    </a:solidFill>
                   </a:tcPr>
                 </a:tc>
                 <a:tc>
@@ -2639,64 +2444,273 @@
                     <a:bodyPr/>
                     <a:lstStyle/>
                     <a:p>
-                      <a:pPr algn="ctr" indent="0" marL="0">
-                        <a:buNone/>
-                      </a:pPr>
-                      <a:r>
-                        <a:rPr lang="en-US" sz="800" dirty="0">
-                          <a:solidFill>
-                            <a:srgbClr val="404040"/>
-                          </a:solidFill>
-                          <a:latin typeface="Calibri" pitchFamily="34" charset="0"/>
-                          <a:ea typeface="Calibri" pitchFamily="34" charset="-122"/>
-                          <a:cs typeface="Calibri" pitchFamily="34" charset="-120"/>
-                        </a:rPr>
-                        <a:t>3.5</a:t>
-                      </a:r>
-                      <a:endParaRPr lang="en-US" sz="800" dirty="0">
+                      <a:pPr indent="0" marL="0">
+                        <a:buNone/>
+                      </a:pPr>
+                      <a:r>
+                        <a:rPr lang="en-US" sz="1000" dirty="0">
+                          <a:solidFill>
+                            <a:srgbClr val="333333"/>
+                          </a:solidFill>
+                          <a:latin typeface="Calibri" pitchFamily="34" charset="0"/>
+                          <a:ea typeface="Calibri" pitchFamily="34" charset="-122"/>
+                          <a:cs typeface="Calibri" pitchFamily="34" charset="-120"/>
+                        </a:rPr>
+                        <a:t>Small-scale (5-10MW) facilities</a:t>
+                      </a:r>
+                      <a:endParaRPr lang="en-US" sz="1000" dirty="0">
+                        <a:latin typeface="Calibri" charset="0"/>
+                        <a:ea typeface="Calibri" charset="0"/>
+                        <a:cs typeface="Calibri" charset="0"/>
+                      </a:endParaRPr>
+                    </a:p>
+                    <a:p>
+                      <a:pPr indent="0" marL="0">
+                        <a:buNone/>
+                      </a:pPr>
+                      <a:r>
+                        <a:rPr lang="en-US" sz="1000" dirty="0">
+                          <a:solidFill>
+                            <a:srgbClr val="333333"/>
+                          </a:solidFill>
+                          <a:latin typeface="Calibri" pitchFamily="34" charset="0"/>
+                          <a:ea typeface="Calibri" pitchFamily="34" charset="-122"/>
+                          <a:cs typeface="Calibri" pitchFamily="34" charset="-120"/>
+                        </a:rPr>
+                        <a:t>that can be replicated, similar</a:t>
+                      </a:r>
+                      <a:endParaRPr lang="en-US" sz="1000" dirty="0">
+                        <a:latin typeface="Calibri" charset="0"/>
+                        <a:ea typeface="Calibri" charset="0"/>
+                        <a:cs typeface="Calibri" charset="0"/>
+                      </a:endParaRPr>
+                    </a:p>
+                    <a:p>
+                      <a:pPr indent="0" marL="0">
+                        <a:buNone/>
+                      </a:pPr>
+                      <a:r>
+                        <a:rPr lang="en-US" sz="1000" dirty="0">
+                          <a:solidFill>
+                            <a:srgbClr val="333333"/>
+                          </a:solidFill>
+                          <a:latin typeface="Calibri" pitchFamily="34" charset="0"/>
+                          <a:ea typeface="Calibri" pitchFamily="34" charset="-122"/>
+                          <a:cs typeface="Calibri" pitchFamily="34" charset="-120"/>
+                        </a:rPr>
+                        <a:t>to utility-scale batteries³</a:t>
+                      </a:r>
+                      <a:endParaRPr lang="en-US" sz="1000" dirty="0">
+                        <a:latin typeface="Calibri" charset="0"/>
+                        <a:ea typeface="Calibri" charset="0"/>
+                        <a:cs typeface="Calibri" charset="0"/>
+                      </a:endParaRPr>
+                    </a:p>
+                    <a:p>
+                      <a:pPr indent="0" marL="0">
+                        <a:buNone/>
+                      </a:pPr>
+                      <a:endParaRPr lang="en-US" sz="1000" dirty="0">
+                        <a:latin typeface="Calibri" charset="0"/>
+                        <a:ea typeface="Calibri" charset="0"/>
+                        <a:cs typeface="Calibri" charset="0"/>
+                      </a:endParaRPr>
+                    </a:p>
+                    <a:p>
+                      <a:pPr indent="0" marL="0">
+                        <a:buNone/>
+                      </a:pPr>
+                      <a:r>
+                        <a:rPr lang="en-US" sz="1000" dirty="0">
+                          <a:solidFill>
+                            <a:srgbClr val="333333"/>
+                          </a:solidFill>
+                          <a:latin typeface="Calibri" pitchFamily="34" charset="0"/>
+                          <a:ea typeface="Calibri" pitchFamily="34" charset="-122"/>
+                          <a:cs typeface="Calibri" pitchFamily="34" charset="-120"/>
+                        </a:rPr>
+                        <a:t>Requiring single/double-digit mn</a:t>
+                      </a:r>
+                      <a:endParaRPr lang="en-US" sz="1000" dirty="0">
+                        <a:latin typeface="Calibri" charset="0"/>
+                        <a:ea typeface="Calibri" charset="0"/>
+                        <a:cs typeface="Calibri" charset="0"/>
+                      </a:endParaRPr>
+                    </a:p>
+                    <a:p>
+                      <a:pPr indent="0" marL="0">
+                        <a:buNone/>
+                      </a:pPr>
+                      <a:r>
+                        <a:rPr lang="en-US" sz="1000" dirty="0">
+                          <a:solidFill>
+                            <a:srgbClr val="333333"/>
+                          </a:solidFill>
+                          <a:latin typeface="Calibri" pitchFamily="34" charset="0"/>
+                          <a:ea typeface="Calibri" pitchFamily="34" charset="-122"/>
+                          <a:cs typeface="Calibri" pitchFamily="34" charset="-120"/>
+                        </a:rPr>
+                        <a:t>EUR CAPEX per facility, expecting</a:t>
+                      </a:r>
+                      <a:endParaRPr lang="en-US" sz="1000" dirty="0">
+                        <a:latin typeface="Calibri" charset="0"/>
+                        <a:ea typeface="Calibri" charset="0"/>
+                        <a:cs typeface="Calibri" charset="0"/>
+                      </a:endParaRPr>
+                    </a:p>
+                    <a:p>
+                      <a:pPr indent="0" marL="0">
+                        <a:buNone/>
+                      </a:pPr>
+                      <a:r>
+                        <a:rPr lang="en-US" sz="1000" dirty="0">
+                          <a:solidFill>
+                            <a:srgbClr val="333333"/>
+                          </a:solidFill>
+                          <a:latin typeface="Calibri" pitchFamily="34" charset="0"/>
+                          <a:ea typeface="Calibri" pitchFamily="34" charset="-122"/>
+                          <a:cs typeface="Calibri" pitchFamily="34" charset="-120"/>
+                        </a:rPr>
+                        <a:t>50-70% reduction until 2030</a:t>
+                      </a:r>
+                      <a:endParaRPr lang="en-US" sz="1000" dirty="0">
                         <a:latin typeface="Calibri" charset="0"/>
                         <a:ea typeface="Calibri" charset="0"/>
                         <a:cs typeface="Calibri" charset="0"/>
                       </a:endParaRPr>
                     </a:p>
                   </a:txBody>
-                  <a:tcPr marL="50800" marR="50800" marT="25400" marB="25400" anchor="ctr">
-                    <a:lnL w="0" cap="flat" cmpd="sng" algn="ctr">
-                      <a:solidFill>
-                        <a:srgbClr val="FFFFFF"/>
+                  <a:tcPr marL="91440" marR="91440" marT="45720" marB="45720" anchor="ctr">
+                    <a:lnL w="9525" cap="flat" cmpd="sng" algn="ctr">
+                      <a:solidFill>
+                        <a:srgbClr val="C0C0C0"/>
                       </a:solidFill>
                       <a:prstDash val="solid"/>
                       <a:round/>
                       <a:headEnd type="none" w="med" len="med"/>
                       <a:tailEnd type="none" w="med" len="med"/>
                     </a:lnL>
-                    <a:lnR w="0" cap="flat" cmpd="sng" algn="ctr">
-                      <a:solidFill>
-                        <a:srgbClr val="FFFFFF"/>
+                    <a:lnR w="9525" cap="flat" cmpd="sng" algn="ctr">
+                      <a:solidFill>
+                        <a:srgbClr val="C0C0C0"/>
                       </a:solidFill>
                       <a:prstDash val="solid"/>
                       <a:round/>
                       <a:headEnd type="none" w="med" len="med"/>
                       <a:tailEnd type="none" w="med" len="med"/>
                     </a:lnR>
-                    <a:lnT w="0" cap="flat" cmpd="sng" algn="ctr">
-                      <a:solidFill>
-                        <a:srgbClr val="FFFFFF"/>
+                    <a:lnT w="9525" cap="flat" cmpd="sng" algn="ctr">
+                      <a:solidFill>
+                        <a:srgbClr val="C0C0C0"/>
                       </a:solidFill>
                       <a:prstDash val="solid"/>
                       <a:round/>
                       <a:headEnd type="none" w="med" len="med"/>
                       <a:tailEnd type="none" w="med" len="med"/>
                     </a:lnT>
-                    <a:lnB w="6350" cap="flat" cmpd="sng" algn="ctr">
-                      <a:solidFill>
-                        <a:srgbClr val="E8E8E8"/>
+                    <a:lnB w="9525" cap="flat" cmpd="sng" algn="ctr">
+                      <a:solidFill>
+                        <a:srgbClr val="C0C0C0"/>
                       </a:solidFill>
                       <a:prstDash val="solid"/>
                       <a:round/>
                       <a:headEnd type="none" w="med" len="med"/>
                       <a:tailEnd type="none" w="med" len="med"/>
                     </a:lnB>
+                    <a:solidFill>
+                      <a:srgbClr val="FFFFFF"/>
+                    </a:solidFill>
+                  </a:tcPr>
+                </a:tc>
+              </a:tr>
+              <a:tr h="457200">
+                <a:tc>
+                  <a:txBody>
+                    <a:bodyPr/>
+                    <a:lstStyle/>
+                    <a:p>
+                      <a:pPr indent="0" marL="0">
+                        <a:buNone/>
+                      </a:pPr>
+                      <a:r>
+                        <a:rPr lang="en-US" sz="1000" b="1" dirty="0">
+                          <a:solidFill>
+                            <a:srgbClr val="000000"/>
+                          </a:solidFill>
+                          <a:latin typeface="Calibri" pitchFamily="34" charset="0"/>
+                          <a:ea typeface="Calibri" pitchFamily="34" charset="-122"/>
+                          <a:cs typeface="Calibri" pitchFamily="34" charset="-120"/>
+                        </a:rPr>
+                        <a:t>EPC</a:t>
+                      </a:r>
+                      <a:endParaRPr lang="en-US" sz="1000" dirty="0">
+                        <a:latin typeface="Calibri" charset="0"/>
+                        <a:ea typeface="Calibri" charset="0"/>
+                        <a:cs typeface="Calibri" charset="0"/>
+                      </a:endParaRPr>
+                    </a:p>
+                    <a:p>
+                      <a:pPr indent="0" marL="0">
+                        <a:buNone/>
+                      </a:pPr>
+                      <a:r>
+                        <a:rPr lang="en-US" sz="1000" b="1" dirty="0">
+                          <a:solidFill>
+                            <a:srgbClr val="000000"/>
+                          </a:solidFill>
+                          <a:latin typeface="Calibri" pitchFamily="34" charset="0"/>
+                          <a:ea typeface="Calibri" pitchFamily="34" charset="-122"/>
+                          <a:cs typeface="Calibri" pitchFamily="34" charset="-120"/>
+                        </a:rPr>
+                        <a:t>duration</a:t>
+                      </a:r>
+                      <a:endParaRPr lang="en-US" sz="1000" dirty="0">
+                        <a:latin typeface="Calibri" charset="0"/>
+                        <a:ea typeface="Calibri" charset="0"/>
+                        <a:cs typeface="Calibri" charset="0"/>
+                      </a:endParaRPr>
+                    </a:p>
+                  </a:txBody>
+                  <a:tcPr marL="91440" marR="91440" marT="45720" marB="45720" anchor="ctr">
+                    <a:lnL w="9525" cap="flat" cmpd="sng" algn="ctr">
+                      <a:solidFill>
+                        <a:srgbClr val="C0C0C0"/>
+                      </a:solidFill>
+                      <a:prstDash val="solid"/>
+                      <a:round/>
+                      <a:headEnd type="none" w="med" len="med"/>
+                      <a:tailEnd type="none" w="med" len="med"/>
+                    </a:lnL>
+                    <a:lnR w="9525" cap="flat" cmpd="sng" algn="ctr">
+                      <a:solidFill>
+                        <a:srgbClr val="C0C0C0"/>
+                      </a:solidFill>
+                      <a:prstDash val="solid"/>
+                      <a:round/>
+                      <a:headEnd type="none" w="med" len="med"/>
+                      <a:tailEnd type="none" w="med" len="med"/>
+                    </a:lnR>
+                    <a:lnT w="9525" cap="flat" cmpd="sng" algn="ctr">
+                      <a:solidFill>
+                        <a:srgbClr val="C0C0C0"/>
+                      </a:solidFill>
+                      <a:prstDash val="solid"/>
+                      <a:round/>
+                      <a:headEnd type="none" w="med" len="med"/>
+                      <a:tailEnd type="none" w="med" len="med"/>
+                    </a:lnT>
+                    <a:lnB w="9525" cap="flat" cmpd="sng" algn="ctr">
+                      <a:solidFill>
+                        <a:srgbClr val="C0C0C0"/>
+                      </a:solidFill>
+                      <a:prstDash val="solid"/>
+                      <a:round/>
+                      <a:headEnd type="none" w="med" len="med"/>
+                      <a:tailEnd type="none" w="med" len="med"/>
+                    </a:lnB>
+                    <a:solidFill>
+                      <a:srgbClr val="FFFFFF"/>
+                    </a:solidFill>
                   </a:tcPr>
                 </a:tc>
                 <a:tc>
@@ -2704,64 +2718,67 @@
                     <a:bodyPr/>
                     <a:lstStyle/>
                     <a:p>
-                      <a:pPr algn="ctr" indent="0" marL="0">
-                        <a:buNone/>
-                      </a:pPr>
-                      <a:r>
-                        <a:rPr lang="en-US" sz="800" dirty="0">
-                          <a:solidFill>
-                            <a:srgbClr val="404040"/>
-                          </a:solidFill>
-                          <a:latin typeface="Calibri" pitchFamily="34" charset="0"/>
-                          <a:ea typeface="Calibri" pitchFamily="34" charset="-122"/>
-                          <a:cs typeface="Calibri" pitchFamily="34" charset="-120"/>
-                        </a:rPr>
-                        <a:t>2.5</a:t>
-                      </a:r>
-                      <a:endParaRPr lang="en-US" sz="800" dirty="0">
+                      <a:pPr indent="0" marL="0">
+                        <a:buNone/>
+                      </a:pPr>
+                      <a:r>
+                        <a:rPr lang="en-US" sz="1000" dirty="0">
+                          <a:solidFill>
+                            <a:srgbClr val="333333"/>
+                          </a:solidFill>
+                          <a:latin typeface="Calibri" pitchFamily="34" charset="0"/>
+                          <a:ea typeface="Calibri" pitchFamily="34" charset="-122"/>
+                          <a:cs typeface="Calibri" pitchFamily="34" charset="-120"/>
+                        </a:rPr>
+                        <a:t>3-5 years EPC</a:t>
+                      </a:r>
+                      <a:endParaRPr lang="en-US" sz="1000" dirty="0">
                         <a:latin typeface="Calibri" charset="0"/>
                         <a:ea typeface="Calibri" charset="0"/>
                         <a:cs typeface="Calibri" charset="0"/>
                       </a:endParaRPr>
                     </a:p>
                   </a:txBody>
-                  <a:tcPr marL="50800" marR="50800" marT="25400" marB="25400" anchor="ctr">
-                    <a:lnL w="0" cap="flat" cmpd="sng" algn="ctr">
-                      <a:solidFill>
-                        <a:srgbClr val="FFFFFF"/>
+                  <a:tcPr marL="91440" marR="91440" marT="45720" marB="45720" anchor="ctr">
+                    <a:lnL w="9525" cap="flat" cmpd="sng" algn="ctr">
+                      <a:solidFill>
+                        <a:srgbClr val="C0C0C0"/>
                       </a:solidFill>
                       <a:prstDash val="solid"/>
                       <a:round/>
                       <a:headEnd type="none" w="med" len="med"/>
                       <a:tailEnd type="none" w="med" len="med"/>
                     </a:lnL>
-                    <a:lnR w="0" cap="flat" cmpd="sng" algn="ctr">
-                      <a:solidFill>
-                        <a:srgbClr val="FFFFFF"/>
+                    <a:lnR w="9525" cap="flat" cmpd="sng" algn="ctr">
+                      <a:solidFill>
+                        <a:srgbClr val="C0C0C0"/>
                       </a:solidFill>
                       <a:prstDash val="solid"/>
                       <a:round/>
                       <a:headEnd type="none" w="med" len="med"/>
                       <a:tailEnd type="none" w="med" len="med"/>
                     </a:lnR>
-                    <a:lnT w="0" cap="flat" cmpd="sng" algn="ctr">
-                      <a:solidFill>
-                        <a:srgbClr val="FFFFFF"/>
+                    <a:lnT w="9525" cap="flat" cmpd="sng" algn="ctr">
+                      <a:solidFill>
+                        <a:srgbClr val="C0C0C0"/>
                       </a:solidFill>
                       <a:prstDash val="solid"/>
                       <a:round/>
                       <a:headEnd type="none" w="med" len="med"/>
                       <a:tailEnd type="none" w="med" len="med"/>
                     </a:lnT>
-                    <a:lnB w="6350" cap="flat" cmpd="sng" algn="ctr">
-                      <a:solidFill>
-                        <a:srgbClr val="E8E8E8"/>
+                    <a:lnB w="9525" cap="flat" cmpd="sng" algn="ctr">
+                      <a:solidFill>
+                        <a:srgbClr val="C0C0C0"/>
                       </a:solidFill>
                       <a:prstDash val="solid"/>
                       <a:round/>
                       <a:headEnd type="none" w="med" len="med"/>
                       <a:tailEnd type="none" w="med" len="med"/>
                     </a:lnB>
+                    <a:solidFill>
+                      <a:srgbClr val="FFFFFF"/>
+                    </a:solidFill>
                   </a:tcPr>
                 </a:tc>
                 <a:tc>
@@ -2769,64 +2786,109 @@
                     <a:bodyPr/>
                     <a:lstStyle/>
                     <a:p>
-                      <a:pPr algn="ctr" indent="0" marL="0">
-                        <a:buNone/>
-                      </a:pPr>
-                      <a:r>
-                        <a:rPr lang="en-US" sz="800" dirty="0">
-                          <a:solidFill>
-                            <a:srgbClr val="404040"/>
-                          </a:solidFill>
-                          <a:latin typeface="Calibri" pitchFamily="34" charset="0"/>
-                          <a:ea typeface="Calibri" pitchFamily="34" charset="-122"/>
-                          <a:cs typeface="Calibri" pitchFamily="34" charset="-120"/>
-                        </a:rPr>
-                        <a:t>2.0</a:t>
-                      </a:r>
-                      <a:endParaRPr lang="en-US" sz="800" dirty="0">
+                      <a:pPr indent="0" marL="0">
+                        <a:buNone/>
+                      </a:pPr>
+                      <a:r>
+                        <a:rPr lang="en-US" sz="1000" dirty="0">
+                          <a:solidFill>
+                            <a:srgbClr val="333333"/>
+                          </a:solidFill>
+                          <a:latin typeface="Calibri" pitchFamily="34" charset="0"/>
+                          <a:ea typeface="Calibri" pitchFamily="34" charset="-122"/>
+                          <a:cs typeface="Calibri" pitchFamily="34" charset="-120"/>
+                        </a:rPr>
+                        <a:t>5-10+ years EPC duration,</a:t>
+                      </a:r>
+                      <a:endParaRPr lang="en-US" sz="1000" dirty="0">
+                        <a:latin typeface="Calibri" charset="0"/>
+                        <a:ea typeface="Calibri" charset="0"/>
+                        <a:cs typeface="Calibri" charset="0"/>
+                      </a:endParaRPr>
+                    </a:p>
+                    <a:p>
+                      <a:pPr indent="0" marL="0">
+                        <a:buNone/>
+                      </a:pPr>
+                      <a:r>
+                        <a:rPr lang="en-US" sz="1000" dirty="0">
+                          <a:solidFill>
+                            <a:srgbClr val="333333"/>
+                          </a:solidFill>
+                          <a:latin typeface="Calibri" pitchFamily="34" charset="0"/>
+                          <a:ea typeface="Calibri" pitchFamily="34" charset="-122"/>
+                          <a:cs typeface="Calibri" pitchFamily="34" charset="-120"/>
+                        </a:rPr>
+                        <a:t>contingent upon development</a:t>
+                      </a:r>
+                      <a:endParaRPr lang="en-US" sz="1000" dirty="0">
+                        <a:latin typeface="Calibri" charset="0"/>
+                        <a:ea typeface="Calibri" charset="0"/>
+                        <a:cs typeface="Calibri" charset="0"/>
+                      </a:endParaRPr>
+                    </a:p>
+                    <a:p>
+                      <a:pPr indent="0" marL="0">
+                        <a:buNone/>
+                      </a:pPr>
+                      <a:r>
+                        <a:rPr lang="en-US" sz="1000" dirty="0">
+                          <a:solidFill>
+                            <a:srgbClr val="333333"/>
+                          </a:solidFill>
+                          <a:latin typeface="Calibri" pitchFamily="34" charset="0"/>
+                          <a:ea typeface="Calibri" pitchFamily="34" charset="-122"/>
+                          <a:cs typeface="Calibri" pitchFamily="34" charset="-120"/>
+                        </a:rPr>
+                        <a:t>of CO2 storage site</a:t>
+                      </a:r>
+                      <a:endParaRPr lang="en-US" sz="1000" dirty="0">
                         <a:latin typeface="Calibri" charset="0"/>
                         <a:ea typeface="Calibri" charset="0"/>
                         <a:cs typeface="Calibri" charset="0"/>
                       </a:endParaRPr>
                     </a:p>
                   </a:txBody>
-                  <a:tcPr marL="50800" marR="50800" marT="25400" marB="25400" anchor="ctr">
-                    <a:lnL w="0" cap="flat" cmpd="sng" algn="ctr">
-                      <a:solidFill>
-                        <a:srgbClr val="FFFFFF"/>
+                  <a:tcPr marL="91440" marR="91440" marT="45720" marB="45720" anchor="ctr">
+                    <a:lnL w="9525" cap="flat" cmpd="sng" algn="ctr">
+                      <a:solidFill>
+                        <a:srgbClr val="C0C0C0"/>
                       </a:solidFill>
                       <a:prstDash val="solid"/>
                       <a:round/>
                       <a:headEnd type="none" w="med" len="med"/>
                       <a:tailEnd type="none" w="med" len="med"/>
                     </a:lnL>
-                    <a:lnR w="0" cap="flat" cmpd="sng" algn="ctr">
-                      <a:solidFill>
-                        <a:srgbClr val="FFFFFF"/>
+                    <a:lnR w="9525" cap="flat" cmpd="sng" algn="ctr">
+                      <a:solidFill>
+                        <a:srgbClr val="C0C0C0"/>
                       </a:solidFill>
                       <a:prstDash val="solid"/>
                       <a:round/>
                       <a:headEnd type="none" w="med" len="med"/>
                       <a:tailEnd type="none" w="med" len="med"/>
                     </a:lnR>
-                    <a:lnT w="0" cap="flat" cmpd="sng" algn="ctr">
-                      <a:solidFill>
-                        <a:srgbClr val="FFFFFF"/>
+                    <a:lnT w="9525" cap="flat" cmpd="sng" algn="ctr">
+                      <a:solidFill>
+                        <a:srgbClr val="C0C0C0"/>
                       </a:solidFill>
                       <a:prstDash val="solid"/>
                       <a:round/>
                       <a:headEnd type="none" w="med" len="med"/>
                       <a:tailEnd type="none" w="med" len="med"/>
                     </a:lnT>
-                    <a:lnB w="6350" cap="flat" cmpd="sng" algn="ctr">
-                      <a:solidFill>
-                        <a:srgbClr val="E8E8E8"/>
+                    <a:lnB w="9525" cap="flat" cmpd="sng" algn="ctr">
+                      <a:solidFill>
+                        <a:srgbClr val="C0C0C0"/>
                       </a:solidFill>
                       <a:prstDash val="solid"/>
                       <a:round/>
                       <a:headEnd type="none" w="med" len="med"/>
                       <a:tailEnd type="none" w="med" len="med"/>
                     </a:lnB>
+                    <a:solidFill>
+                      <a:srgbClr val="FFFFFF"/>
+                    </a:solidFill>
                   </a:tcPr>
                 </a:tc>
                 <a:tc>
@@ -2834,131 +2896,158 @@
                     <a:bodyPr/>
                     <a:lstStyle/>
                     <a:p>
-                      <a:pPr algn="ctr" indent="0" marL="0">
-                        <a:buNone/>
-                      </a:pPr>
-                      <a:r>
-                        <a:rPr lang="en-US" sz="800" dirty="0">
-                          <a:solidFill>
-                            <a:srgbClr val="404040"/>
-                          </a:solidFill>
-                          <a:latin typeface="Calibri" pitchFamily="34" charset="0"/>
-                          <a:ea typeface="Calibri" pitchFamily="34" charset="-122"/>
-                          <a:cs typeface="Calibri" pitchFamily="34" charset="-120"/>
-                        </a:rPr>
-                        <a:t>1.5</a:t>
-                      </a:r>
-                      <a:endParaRPr lang="en-US" sz="800" dirty="0">
+                      <a:pPr indent="0" marL="0">
+                        <a:buNone/>
+                      </a:pPr>
+                      <a:r>
+                        <a:rPr lang="en-US" sz="1000" dirty="0">
+                          <a:solidFill>
+                            <a:srgbClr val="333333"/>
+                          </a:solidFill>
+                          <a:latin typeface="Calibri" pitchFamily="34" charset="0"/>
+                          <a:ea typeface="Calibri" pitchFamily="34" charset="-122"/>
+                          <a:cs typeface="Calibri" pitchFamily="34" charset="-120"/>
+                        </a:rPr>
+                        <a:t>1-3 years EPC duration</a:t>
+                      </a:r>
+                      <a:endParaRPr lang="en-US" sz="1000" dirty="0">
                         <a:latin typeface="Calibri" charset="0"/>
                         <a:ea typeface="Calibri" charset="0"/>
                         <a:cs typeface="Calibri" charset="0"/>
                       </a:endParaRPr>
                     </a:p>
                   </a:txBody>
-                  <a:tcPr marL="50800" marR="50800" marT="25400" marB="25400" anchor="ctr">
-                    <a:lnL w="0" cap="flat" cmpd="sng" algn="ctr">
-                      <a:solidFill>
-                        <a:srgbClr val="FFFFFF"/>
+                  <a:tcPr marL="91440" marR="91440" marT="45720" marB="45720" anchor="ctr">
+                    <a:lnL w="9525" cap="flat" cmpd="sng" algn="ctr">
+                      <a:solidFill>
+                        <a:srgbClr val="C0C0C0"/>
                       </a:solidFill>
                       <a:prstDash val="solid"/>
                       <a:round/>
                       <a:headEnd type="none" w="med" len="med"/>
                       <a:tailEnd type="none" w="med" len="med"/>
                     </a:lnL>
-                    <a:lnR w="0" cap="flat" cmpd="sng" algn="ctr">
-                      <a:solidFill>
-                        <a:srgbClr val="FFFFFF"/>
+                    <a:lnR w="9525" cap="flat" cmpd="sng" algn="ctr">
+                      <a:solidFill>
+                        <a:srgbClr val="C0C0C0"/>
                       </a:solidFill>
                       <a:prstDash val="solid"/>
                       <a:round/>
                       <a:headEnd type="none" w="med" len="med"/>
                       <a:tailEnd type="none" w="med" len="med"/>
                     </a:lnR>
-                    <a:lnT w="0" cap="flat" cmpd="sng" algn="ctr">
-                      <a:solidFill>
-                        <a:srgbClr val="FFFFFF"/>
+                    <a:lnT w="9525" cap="flat" cmpd="sng" algn="ctr">
+                      <a:solidFill>
+                        <a:srgbClr val="C0C0C0"/>
                       </a:solidFill>
                       <a:prstDash val="solid"/>
                       <a:round/>
                       <a:headEnd type="none" w="med" len="med"/>
                       <a:tailEnd type="none" w="med" len="med"/>
                     </a:lnT>
-                    <a:lnB w="6350" cap="flat" cmpd="sng" algn="ctr">
-                      <a:solidFill>
-                        <a:srgbClr val="E8E8E8"/>
+                    <a:lnB w="9525" cap="flat" cmpd="sng" algn="ctr">
+                      <a:solidFill>
+                        <a:srgbClr val="C0C0C0"/>
                       </a:solidFill>
                       <a:prstDash val="solid"/>
                       <a:round/>
                       <a:headEnd type="none" w="med" len="med"/>
                       <a:tailEnd type="none" w="med" len="med"/>
                     </a:lnB>
+                    <a:solidFill>
+                      <a:srgbClr val="FFFFFF"/>
+                    </a:solidFill>
                   </a:tcPr>
                 </a:tc>
               </a:tr>
-              <a:tr h="256032">
+              <a:tr h="320040">
                 <a:tc>
                   <a:txBody>
                     <a:bodyPr/>
                     <a:lstStyle/>
                     <a:p>
-                      <a:pPr algn="l" indent="0" marL="0">
-                        <a:buNone/>
-                      </a:pPr>
-                      <a:r>
-                        <a:rPr lang="en-US" sz="850" b="1" dirty="0">
-                          <a:solidFill>
-                            <a:srgbClr val="333333"/>
-                          </a:solidFill>
-                          <a:latin typeface="Calibri" pitchFamily="34" charset="0"/>
-                          <a:ea typeface="Calibri" pitchFamily="34" charset="-122"/>
-                          <a:cs typeface="Calibri" pitchFamily="34" charset="-120"/>
-                        </a:rPr>
-                        <a:t>H₂ Production (kt/yr)</a:t>
-                      </a:r>
-                      <a:endParaRPr lang="en-US" sz="850" dirty="0">
+                      <a:pPr indent="0" marL="0">
+                        <a:buNone/>
+                      </a:pPr>
+                      <a:r>
+                        <a:rPr lang="en-US" sz="1000" b="1" dirty="0">
+                          <a:solidFill>
+                            <a:srgbClr val="000000"/>
+                          </a:solidFill>
+                          <a:latin typeface="Calibri" pitchFamily="34" charset="0"/>
+                          <a:ea typeface="Calibri" pitchFamily="34" charset="-122"/>
+                          <a:cs typeface="Calibri" pitchFamily="34" charset="-120"/>
+                        </a:rPr>
+                        <a:t>Direct link to</a:t>
+                      </a:r>
+                      <a:endParaRPr lang="en-US" sz="1000" dirty="0">
+                        <a:latin typeface="Calibri" charset="0"/>
+                        <a:ea typeface="Calibri" charset="0"/>
+                        <a:cs typeface="Calibri" charset="0"/>
+                      </a:endParaRPr>
+                    </a:p>
+                    <a:p>
+                      <a:pPr indent="0" marL="0">
+                        <a:buNone/>
+                      </a:pPr>
+                      <a:r>
+                        <a:rPr lang="en-US" sz="1000" b="1" dirty="0">
+                          <a:solidFill>
+                            <a:srgbClr val="000000"/>
+                          </a:solidFill>
+                          <a:latin typeface="Calibri" pitchFamily="34" charset="0"/>
+                          <a:ea typeface="Calibri" pitchFamily="34" charset="-122"/>
+                          <a:cs typeface="Calibri" pitchFamily="34" charset="-120"/>
+                        </a:rPr>
+                        <a:t>power sector</a:t>
+                      </a:r>
+                      <a:endParaRPr lang="en-US" sz="1000" dirty="0">
                         <a:latin typeface="Calibri" charset="0"/>
                         <a:ea typeface="Calibri" charset="0"/>
                         <a:cs typeface="Calibri" charset="0"/>
                       </a:endParaRPr>
                     </a:p>
                   </a:txBody>
-                  <a:tcPr marL="50800" marR="50800" marT="25400" marB="25400" anchor="ctr">
-                    <a:lnL w="0" cap="flat" cmpd="sng" algn="ctr">
-                      <a:solidFill>
-                        <a:srgbClr val="FFFFFF"/>
+                  <a:tcPr marL="91440" marR="91440" marT="45720" marB="45720" anchor="ctr">
+                    <a:lnL w="9525" cap="flat" cmpd="sng" algn="ctr">
+                      <a:solidFill>
+                        <a:srgbClr val="C0C0C0"/>
                       </a:solidFill>
                       <a:prstDash val="solid"/>
                       <a:round/>
                       <a:headEnd type="none" w="med" len="med"/>
                       <a:tailEnd type="none" w="med" len="med"/>
                     </a:lnL>
-                    <a:lnR w="0" cap="flat" cmpd="sng" algn="ctr">
-                      <a:solidFill>
-                        <a:srgbClr val="FFFFFF"/>
+                    <a:lnR w="9525" cap="flat" cmpd="sng" algn="ctr">
+                      <a:solidFill>
+                        <a:srgbClr val="C0C0C0"/>
                       </a:solidFill>
                       <a:prstDash val="solid"/>
                       <a:round/>
                       <a:headEnd type="none" w="med" len="med"/>
                       <a:tailEnd type="none" w="med" len="med"/>
                     </a:lnR>
-                    <a:lnT w="0" cap="flat" cmpd="sng" algn="ctr">
-                      <a:solidFill>
-                        <a:srgbClr val="FFFFFF"/>
+                    <a:lnT w="9525" cap="flat" cmpd="sng" algn="ctr">
+                      <a:solidFill>
+                        <a:srgbClr val="C0C0C0"/>
                       </a:solidFill>
                       <a:prstDash val="solid"/>
                       <a:round/>
                       <a:headEnd type="none" w="med" len="med"/>
                       <a:tailEnd type="none" w="med" len="med"/>
                     </a:lnT>
-                    <a:lnB w="12700" cap="flat" cmpd="sng" algn="ctr">
-                      <a:solidFill>
-                        <a:srgbClr val="0C2340"/>
+                    <a:lnB w="9525" cap="flat" cmpd="sng" algn="ctr">
+                      <a:solidFill>
+                        <a:srgbClr val="C0C0C0"/>
                       </a:solidFill>
                       <a:prstDash val="solid"/>
                       <a:round/>
                       <a:headEnd type="none" w="med" len="med"/>
                       <a:tailEnd type="none" w="med" len="med"/>
                     </a:lnB>
+                    <a:solidFill>
+                      <a:srgbClr val="FFFFFF"/>
+                    </a:solidFill>
                   </a:tcPr>
                 </a:tc>
                 <a:tc>
@@ -2966,64 +3055,67 @@
                     <a:bodyPr/>
                     <a:lstStyle/>
                     <a:p>
-                      <a:pPr algn="ctr" indent="0" marL="0">
-                        <a:buNone/>
-                      </a:pPr>
-                      <a:r>
-                        <a:rPr lang="en-US" sz="800" dirty="0">
-                          <a:solidFill>
-                            <a:srgbClr val="404040"/>
-                          </a:solidFill>
-                          <a:latin typeface="Calibri" pitchFamily="34" charset="0"/>
-                          <a:ea typeface="Calibri" pitchFamily="34" charset="-122"/>
-                          <a:cs typeface="Calibri" pitchFamily="34" charset="-120"/>
-                        </a:rPr>
-                        <a:t>~10</a:t>
-                      </a:r>
-                      <a:endParaRPr lang="en-US" sz="800" dirty="0">
+                      <a:pPr indent="0" marL="0">
+                        <a:buNone/>
+                      </a:pPr>
+                      <a:r>
+                        <a:rPr lang="en-US" sz="1000" dirty="0">
+                          <a:solidFill>
+                            <a:srgbClr val="333333"/>
+                          </a:solidFill>
+                          <a:latin typeface="Calibri" pitchFamily="34" charset="0"/>
+                          <a:ea typeface="Calibri" pitchFamily="34" charset="-122"/>
+                          <a:cs typeface="Calibri" pitchFamily="34" charset="-120"/>
+                        </a:rPr>
+                        <a:t>X</a:t>
+                      </a:r>
+                      <a:endParaRPr lang="en-US" sz="1000" dirty="0">
                         <a:latin typeface="Calibri" charset="0"/>
                         <a:ea typeface="Calibri" charset="0"/>
                         <a:cs typeface="Calibri" charset="0"/>
                       </a:endParaRPr>
                     </a:p>
                   </a:txBody>
-                  <a:tcPr marL="50800" marR="50800" marT="25400" marB="25400" anchor="ctr">
-                    <a:lnL w="0" cap="flat" cmpd="sng" algn="ctr">
-                      <a:solidFill>
-                        <a:srgbClr val="FFFFFF"/>
+                  <a:tcPr marL="91440" marR="91440" marT="45720" marB="45720" anchor="ctr">
+                    <a:lnL w="9525" cap="flat" cmpd="sng" algn="ctr">
+                      <a:solidFill>
+                        <a:srgbClr val="C0C0C0"/>
                       </a:solidFill>
                       <a:prstDash val="solid"/>
                       <a:round/>
                       <a:headEnd type="none" w="med" len="med"/>
                       <a:tailEnd type="none" w="med" len="med"/>
                     </a:lnL>
-                    <a:lnR w="0" cap="flat" cmpd="sng" algn="ctr">
-                      <a:solidFill>
-                        <a:srgbClr val="FFFFFF"/>
+                    <a:lnR w="9525" cap="flat" cmpd="sng" algn="ctr">
+                      <a:solidFill>
+                        <a:srgbClr val="C0C0C0"/>
                       </a:solidFill>
                       <a:prstDash val="solid"/>
                       <a:round/>
                       <a:headEnd type="none" w="med" len="med"/>
                       <a:tailEnd type="none" w="med" len="med"/>
                     </a:lnR>
-                    <a:lnT w="0" cap="flat" cmpd="sng" algn="ctr">
-                      <a:solidFill>
-                        <a:srgbClr val="FFFFFF"/>
+                    <a:lnT w="9525" cap="flat" cmpd="sng" algn="ctr">
+                      <a:solidFill>
+                        <a:srgbClr val="C0C0C0"/>
                       </a:solidFill>
                       <a:prstDash val="solid"/>
                       <a:round/>
                       <a:headEnd type="none" w="med" len="med"/>
                       <a:tailEnd type="none" w="med" len="med"/>
                     </a:lnT>
-                    <a:lnB w="12700" cap="flat" cmpd="sng" algn="ctr">
-                      <a:solidFill>
-                        <a:srgbClr val="0C2340"/>
+                    <a:lnB w="9525" cap="flat" cmpd="sng" algn="ctr">
+                      <a:solidFill>
+                        <a:srgbClr val="C0C0C0"/>
                       </a:solidFill>
                       <a:prstDash val="solid"/>
                       <a:round/>
                       <a:headEnd type="none" w="med" len="med"/>
                       <a:tailEnd type="none" w="med" len="med"/>
                     </a:lnB>
+                    <a:solidFill>
+                      <a:srgbClr val="FFFFFF"/>
+                    </a:solidFill>
                   </a:tcPr>
                 </a:tc>
                 <a:tc>
@@ -3031,64 +3123,67 @@
                     <a:bodyPr/>
                     <a:lstStyle/>
                     <a:p>
-                      <a:pPr algn="ctr" indent="0" marL="0">
-                        <a:buNone/>
-                      </a:pPr>
-                      <a:r>
-                        <a:rPr lang="en-US" sz="800" dirty="0">
-                          <a:solidFill>
-                            <a:srgbClr val="404040"/>
-                          </a:solidFill>
-                          <a:latin typeface="Calibri" pitchFamily="34" charset="0"/>
-                          <a:ea typeface="Calibri" pitchFamily="34" charset="-122"/>
-                          <a:cs typeface="Calibri" pitchFamily="34" charset="-120"/>
-                        </a:rPr>
-                        <a:t>~80</a:t>
-                      </a:r>
-                      <a:endParaRPr lang="en-US" sz="800" dirty="0">
+                      <a:pPr indent="0" marL="0">
+                        <a:buNone/>
+                      </a:pPr>
+                      <a:r>
+                        <a:rPr lang="en-US" sz="1000" dirty="0">
+                          <a:solidFill>
+                            <a:srgbClr val="333333"/>
+                          </a:solidFill>
+                          <a:latin typeface="Calibri" pitchFamily="34" charset="0"/>
+                          <a:ea typeface="Calibri" pitchFamily="34" charset="-122"/>
+                          <a:cs typeface="Calibri" pitchFamily="34" charset="-120"/>
+                        </a:rPr>
+                        <a:t>X</a:t>
+                      </a:r>
+                      <a:endParaRPr lang="en-US" sz="1000" dirty="0">
                         <a:latin typeface="Calibri" charset="0"/>
                         <a:ea typeface="Calibri" charset="0"/>
                         <a:cs typeface="Calibri" charset="0"/>
                       </a:endParaRPr>
                     </a:p>
                   </a:txBody>
-                  <a:tcPr marL="50800" marR="50800" marT="25400" marB="25400" anchor="ctr">
-                    <a:lnL w="0" cap="flat" cmpd="sng" algn="ctr">
-                      <a:solidFill>
-                        <a:srgbClr val="FFFFFF"/>
+                  <a:tcPr marL="91440" marR="91440" marT="45720" marB="45720" anchor="ctr">
+                    <a:lnL w="9525" cap="flat" cmpd="sng" algn="ctr">
+                      <a:solidFill>
+                        <a:srgbClr val="C0C0C0"/>
                       </a:solidFill>
                       <a:prstDash val="solid"/>
                       <a:round/>
                       <a:headEnd type="none" w="med" len="med"/>
                       <a:tailEnd type="none" w="med" len="med"/>
                     </a:lnL>
-                    <a:lnR w="0" cap="flat" cmpd="sng" algn="ctr">
-                      <a:solidFill>
-                        <a:srgbClr val="FFFFFF"/>
+                    <a:lnR w="9525" cap="flat" cmpd="sng" algn="ctr">
+                      <a:solidFill>
+                        <a:srgbClr val="C0C0C0"/>
                       </a:solidFill>
                       <a:prstDash val="solid"/>
                       <a:round/>
                       <a:headEnd type="none" w="med" len="med"/>
                       <a:tailEnd type="none" w="med" len="med"/>
                     </a:lnR>
-                    <a:lnT w="0" cap="flat" cmpd="sng" algn="ctr">
-                      <a:solidFill>
-                        <a:srgbClr val="FFFFFF"/>
+                    <a:lnT w="9525" cap="flat" cmpd="sng" algn="ctr">
+                      <a:solidFill>
+                        <a:srgbClr val="C0C0C0"/>
                       </a:solidFill>
                       <a:prstDash val="solid"/>
                       <a:round/>
                       <a:headEnd type="none" w="med" len="med"/>
                       <a:tailEnd type="none" w="med" len="med"/>
                     </a:lnT>
-                    <a:lnB w="12700" cap="flat" cmpd="sng" algn="ctr">
-                      <a:solidFill>
-                        <a:srgbClr val="0C2340"/>
+                    <a:lnB w="9525" cap="flat" cmpd="sng" algn="ctr">
+                      <a:solidFill>
+                        <a:srgbClr val="C0C0C0"/>
                       </a:solidFill>
                       <a:prstDash val="solid"/>
                       <a:round/>
                       <a:headEnd type="none" w="med" len="med"/>
                       <a:tailEnd type="none" w="med" len="med"/>
                     </a:lnB>
+                    <a:solidFill>
+                      <a:srgbClr val="FFFFFF"/>
+                    </a:solidFill>
                   </a:tcPr>
                 </a:tc>
                 <a:tc>
@@ -3096,194 +3191,67 @@
                     <a:bodyPr/>
                     <a:lstStyle/>
                     <a:p>
-                      <a:pPr algn="ctr" indent="0" marL="0">
-                        <a:buNone/>
-                      </a:pPr>
-                      <a:r>
-                        <a:rPr lang="en-US" sz="800" dirty="0">
-                          <a:solidFill>
-                            <a:srgbClr val="404040"/>
-                          </a:solidFill>
-                          <a:latin typeface="Calibri" pitchFamily="34" charset="0"/>
-                          <a:ea typeface="Calibri" pitchFamily="34" charset="-122"/>
-                          <a:cs typeface="Calibri" pitchFamily="34" charset="-120"/>
-                        </a:rPr>
-                        <a:t>~200</a:t>
-                      </a:r>
-                      <a:endParaRPr lang="en-US" sz="800" dirty="0">
+                      <a:pPr indent="0" marL="0">
+                        <a:buNone/>
+                      </a:pPr>
+                      <a:r>
+                        <a:rPr lang="en-US" sz="1000" dirty="0">
+                          <a:solidFill>
+                            <a:srgbClr val="333333"/>
+                          </a:solidFill>
+                          <a:latin typeface="Calibri" pitchFamily="34" charset="0"/>
+                          <a:ea typeface="Calibri" pitchFamily="34" charset="-122"/>
+                          <a:cs typeface="Calibri" pitchFamily="34" charset="-120"/>
+                        </a:rPr>
+                        <a:t>✓</a:t>
+                      </a:r>
+                      <a:endParaRPr lang="en-US" sz="1000" dirty="0">
                         <a:latin typeface="Calibri" charset="0"/>
                         <a:ea typeface="Calibri" charset="0"/>
                         <a:cs typeface="Calibri" charset="0"/>
                       </a:endParaRPr>
                     </a:p>
                   </a:txBody>
-                  <a:tcPr marL="50800" marR="50800" marT="25400" marB="25400" anchor="ctr">
-                    <a:lnL w="0" cap="flat" cmpd="sng" algn="ctr">
-                      <a:solidFill>
-                        <a:srgbClr val="FFFFFF"/>
+                  <a:tcPr marL="91440" marR="91440" marT="45720" marB="45720" anchor="ctr">
+                    <a:lnL w="9525" cap="flat" cmpd="sng" algn="ctr">
+                      <a:solidFill>
+                        <a:srgbClr val="C0C0C0"/>
                       </a:solidFill>
                       <a:prstDash val="solid"/>
                       <a:round/>
                       <a:headEnd type="none" w="med" len="med"/>
                       <a:tailEnd type="none" w="med" len="med"/>
                     </a:lnL>
-                    <a:lnR w="0" cap="flat" cmpd="sng" algn="ctr">
-                      <a:solidFill>
-                        <a:srgbClr val="FFFFFF"/>
+                    <a:lnR w="9525" cap="flat" cmpd="sng" algn="ctr">
+                      <a:solidFill>
+                        <a:srgbClr val="C0C0C0"/>
                       </a:solidFill>
                       <a:prstDash val="solid"/>
                       <a:round/>
                       <a:headEnd type="none" w="med" len="med"/>
                       <a:tailEnd type="none" w="med" len="med"/>
                     </a:lnR>
-                    <a:lnT w="0" cap="flat" cmpd="sng" algn="ctr">
-                      <a:solidFill>
-                        <a:srgbClr val="FFFFFF"/>
+                    <a:lnT w="9525" cap="flat" cmpd="sng" algn="ctr">
+                      <a:solidFill>
+                        <a:srgbClr val="C0C0C0"/>
                       </a:solidFill>
                       <a:prstDash val="solid"/>
                       <a:round/>
                       <a:headEnd type="none" w="med" len="med"/>
                       <a:tailEnd type="none" w="med" len="med"/>
                     </a:lnT>
-                    <a:lnB w="12700" cap="flat" cmpd="sng" algn="ctr">
-                      <a:solidFill>
-                        <a:srgbClr val="0C2340"/>
+                    <a:lnB w="9525" cap="flat" cmpd="sng" algn="ctr">
+                      <a:solidFill>
+                        <a:srgbClr val="C0C0C0"/>
                       </a:solidFill>
                       <a:prstDash val="solid"/>
                       <a:round/>
                       <a:headEnd type="none" w="med" len="med"/>
                       <a:tailEnd type="none" w="med" len="med"/>
                     </a:lnB>
-                  </a:tcPr>
-                </a:tc>
-                <a:tc>
-                  <a:txBody>
-                    <a:bodyPr/>
-                    <a:lstStyle/>
-                    <a:p>
-                      <a:pPr algn="ctr" indent="0" marL="0">
-                        <a:buNone/>
-                      </a:pPr>
-                      <a:r>
-                        <a:rPr lang="en-US" sz="800" dirty="0">
-                          <a:solidFill>
-                            <a:srgbClr val="404040"/>
-                          </a:solidFill>
-                          <a:latin typeface="Calibri" pitchFamily="34" charset="0"/>
-                          <a:ea typeface="Calibri" pitchFamily="34" charset="-122"/>
-                          <a:cs typeface="Calibri" pitchFamily="34" charset="-120"/>
-                        </a:rPr>
-                        <a:t>~400</a:t>
-                      </a:r>
-                      <a:endParaRPr lang="en-US" sz="800" dirty="0">
-                        <a:latin typeface="Calibri" charset="0"/>
-                        <a:ea typeface="Calibri" charset="0"/>
-                        <a:cs typeface="Calibri" charset="0"/>
-                      </a:endParaRPr>
-                    </a:p>
-                  </a:txBody>
-                  <a:tcPr marL="50800" marR="50800" marT="25400" marB="25400" anchor="ctr">
-                    <a:lnL w="0" cap="flat" cmpd="sng" algn="ctr">
-                      <a:solidFill>
-                        <a:srgbClr val="FFFFFF"/>
-                      </a:solidFill>
-                      <a:prstDash val="solid"/>
-                      <a:round/>
-                      <a:headEnd type="none" w="med" len="med"/>
-                      <a:tailEnd type="none" w="med" len="med"/>
-                    </a:lnL>
-                    <a:lnR w="0" cap="flat" cmpd="sng" algn="ctr">
-                      <a:solidFill>
-                        <a:srgbClr val="FFFFFF"/>
-                      </a:solidFill>
-                      <a:prstDash val="solid"/>
-                      <a:round/>
-                      <a:headEnd type="none" w="med" len="med"/>
-                      <a:tailEnd type="none" w="med" len="med"/>
-                    </a:lnR>
-                    <a:lnT w="0" cap="flat" cmpd="sng" algn="ctr">
-                      <a:solidFill>
-                        <a:srgbClr val="FFFFFF"/>
-                      </a:solidFill>
-                      <a:prstDash val="solid"/>
-                      <a:round/>
-                      <a:headEnd type="none" w="med" len="med"/>
-                      <a:tailEnd type="none" w="med" len="med"/>
-                    </a:lnT>
-                    <a:lnB w="12700" cap="flat" cmpd="sng" algn="ctr">
-                      <a:solidFill>
-                        <a:srgbClr val="0C2340"/>
-                      </a:solidFill>
-                      <a:prstDash val="solid"/>
-                      <a:round/>
-                      <a:headEnd type="none" w="med" len="med"/>
-                      <a:tailEnd type="none" w="med" len="med"/>
-                    </a:lnB>
-                  </a:tcPr>
-                </a:tc>
-                <a:tc>
-                  <a:txBody>
-                    <a:bodyPr/>
-                    <a:lstStyle/>
-                    <a:p>
-                      <a:pPr algn="ctr" indent="0" marL="0">
-                        <a:buNone/>
-                      </a:pPr>
-                      <a:r>
-                        <a:rPr lang="en-US" sz="800" dirty="0">
-                          <a:solidFill>
-                            <a:srgbClr val="404040"/>
-                          </a:solidFill>
-                          <a:latin typeface="Calibri" pitchFamily="34" charset="0"/>
-                          <a:ea typeface="Calibri" pitchFamily="34" charset="-122"/>
-                          <a:cs typeface="Calibri" pitchFamily="34" charset="-120"/>
-                        </a:rPr>
-                        <a:t>~800</a:t>
-                      </a:r>
-                      <a:endParaRPr lang="en-US" sz="800" dirty="0">
-                        <a:latin typeface="Calibri" charset="0"/>
-                        <a:ea typeface="Calibri" charset="0"/>
-                        <a:cs typeface="Calibri" charset="0"/>
-                      </a:endParaRPr>
-                    </a:p>
-                  </a:txBody>
-                  <a:tcPr marL="50800" marR="50800" marT="25400" marB="25400" anchor="ctr">
-                    <a:lnL w="0" cap="flat" cmpd="sng" algn="ctr">
-                      <a:solidFill>
-                        <a:srgbClr val="FFFFFF"/>
-                      </a:solidFill>
-                      <a:prstDash val="solid"/>
-                      <a:round/>
-                      <a:headEnd type="none" w="med" len="med"/>
-                      <a:tailEnd type="none" w="med" len="med"/>
-                    </a:lnL>
-                    <a:lnR w="0" cap="flat" cmpd="sng" algn="ctr">
-                      <a:solidFill>
-                        <a:srgbClr val="FFFFFF"/>
-                      </a:solidFill>
-                      <a:prstDash val="solid"/>
-                      <a:round/>
-                      <a:headEnd type="none" w="med" len="med"/>
-                      <a:tailEnd type="none" w="med" len="med"/>
-                    </a:lnR>
-                    <a:lnT w="0" cap="flat" cmpd="sng" algn="ctr">
-                      <a:solidFill>
-                        <a:srgbClr val="FFFFFF"/>
-                      </a:solidFill>
-                      <a:prstDash val="solid"/>
-                      <a:round/>
-                      <a:headEnd type="none" w="med" len="med"/>
-                      <a:tailEnd type="none" w="med" len="med"/>
-                    </a:lnT>
-                    <a:lnB w="12700" cap="flat" cmpd="sng" algn="ctr">
-                      <a:solidFill>
-                        <a:srgbClr val="0C2340"/>
-                      </a:solidFill>
-                      <a:prstDash val="solid"/>
-                      <a:round/>
-                      <a:headEnd type="none" w="med" len="med"/>
-                      <a:tailEnd type="none" w="med" len="med"/>
-                    </a:lnB>
+                    <a:solidFill>
+                      <a:srgbClr val="FFFFFF"/>
+                    </a:solidFill>
                   </a:tcPr>
                 </a:tc>
               </a:tr>
@@ -3293,14 +3261,14 @@
       </p:graphicFrame>
       <p:sp>
         <p:nvSpPr>
-          <p:cNvPr id="25" name="Text 22"/>
+          <p:cNvPr id="7" name="Text 4"/>
           <p:cNvSpPr/>
           <p:nvPr/>
         </p:nvSpPr>
         <p:spPr>
           <a:xfrm>
-            <a:off x="457200" y="4846320"/>
-            <a:ext cx="8229600" cy="228600"/>
+            <a:off x="457200" y="4462272"/>
+            <a:ext cx="7772400" cy="384048"/>
           </a:xfrm>
           <a:prstGeom prst="rect">
             <a:avLst/>
@@ -3312,33 +3280,96 @@
           <a:bodyPr wrap="square" lIns="0" tIns="0" rIns="0" bIns="0" rtlCol="0" anchor="ctr"/>
           <a:lstStyle/>
           <a:p>
-            <a:pPr algn="l" indent="0" marL="0">
+            <a:pPr indent="0" marL="0">
+              <a:lnSpc>
+                <a:spcPct val="115000"/>
+              </a:lnSpc>
               <a:buNone/>
             </a:pPr>
             <a:r>
-              <a:rPr lang="en-US" sz="700" i="1" dirty="0">
+              <a:rPr lang="en-US" sz="650" dirty="0">
                 <a:solidFill>
-                  <a:srgbClr val="999999"/>
+                  <a:srgbClr val="666666"/>
                 </a:solidFill>
                 <a:latin typeface="Calibri" pitchFamily="34" charset="0"/>
                 <a:ea typeface="Calibri" pitchFamily="34" charset="-122"/>
                 <a:cs typeface="Calibri" pitchFamily="34" charset="-120"/>
               </a:rPr>
-              <a:t>Note: Capacity targets based on Dutch National Hydrogen Strategy and EU REPowerEU plan; cost projections are indicative estimates.</a:t>
+              <a:t>1.  Process: Sulfur Removal, Synthesis Gas Production via Steam-Methane Reforming (SMR) or Auto-Thermal Reforming (ATR), CO Shift Reaction,</a:t>
             </a:r>
-            <a:endParaRPr lang="en-US" sz="700" dirty="0"/>
+            <a:endParaRPr lang="en-US" sz="650" dirty="0"/>
+          </a:p>
+          <a:p>
+            <a:pPr indent="0" marL="0">
+              <a:lnSpc>
+                <a:spcPct val="115000"/>
+              </a:lnSpc>
+              <a:buNone/>
+            </a:pPr>
+            <a:r>
+              <a:rPr lang="en-US" sz="650" dirty="0">
+                <a:solidFill>
+                  <a:srgbClr val="666666"/>
+                </a:solidFill>
+                <a:latin typeface="Calibri" pitchFamily="34" charset="0"/>
+                <a:ea typeface="Calibri" pitchFamily="34" charset="-122"/>
+                <a:cs typeface="Calibri" pitchFamily="34" charset="-120"/>
+              </a:rPr>
+              <a:t>     Purification. The latter is expected to offer higher efficiencies in combination with CCS. Grey hydrogen can also be produced from coal gasification.</a:t>
+            </a:r>
+            <a:endParaRPr lang="en-US" sz="650" dirty="0"/>
+          </a:p>
+          <a:p>
+            <a:pPr indent="0" marL="0">
+              <a:lnSpc>
+                <a:spcPct val="115000"/>
+              </a:lnSpc>
+              <a:buNone/>
+            </a:pPr>
+            <a:r>
+              <a:rPr lang="en-US" sz="650" dirty="0">
+                <a:solidFill>
+                  <a:srgbClr val="666666"/>
+                </a:solidFill>
+                <a:latin typeface="Calibri" pitchFamily="34" charset="0"/>
+                <a:ea typeface="Calibri" pitchFamily="34" charset="-122"/>
+                <a:cs typeface="Calibri" pitchFamily="34" charset="-120"/>
+              </a:rPr>
+              <a:t>2.  In Australia, producing hydrogen from electrolyzers that run on grid electricity would lead to an emission intensity of ~40 kgCO2/kgH2.</a:t>
+            </a:r>
+            <a:endParaRPr lang="en-US" sz="650" dirty="0"/>
+          </a:p>
+          <a:p>
+            <a:pPr indent="0" marL="0">
+              <a:lnSpc>
+                <a:spcPct val="115000"/>
+              </a:lnSpc>
+              <a:buNone/>
+            </a:pPr>
+            <a:r>
+              <a:rPr lang="en-US" sz="650" dirty="0">
+                <a:solidFill>
+                  <a:srgbClr val="666666"/>
+                </a:solidFill>
+                <a:latin typeface="Calibri" pitchFamily="34" charset="0"/>
+                <a:ea typeface="Calibri" pitchFamily="34" charset="-122"/>
+                <a:cs typeface="Calibri" pitchFamily="34" charset="-120"/>
+              </a:rPr>
+              <a:t>3.  Especially PEM electrolyzers can be largely pre-assembled, containerized, and stacked.</a:t>
+            </a:r>
+            <a:endParaRPr lang="en-US" sz="650" dirty="0"/>
           </a:p>
         </p:txBody>
       </p:sp>
       <p:sp>
         <p:nvSpPr>
-          <p:cNvPr id="26" name="Shape 23"/>
+          <p:cNvPr id="8" name="Shape 5"/>
           <p:cNvSpPr/>
           <p:nvPr/>
         </p:nvSpPr>
         <p:spPr>
           <a:xfrm>
-            <a:off x="457200" y="6263640"/>
+            <a:off x="457200" y="4864608"/>
             <a:ext cx="8229600" cy="0"/>
           </a:xfrm>
           <a:prstGeom prst="line">
@@ -3355,53 +3386,14 @@
       </p:sp>
       <p:sp>
         <p:nvSpPr>
-          <p:cNvPr id="27" name="Text 24"/>
+          <p:cNvPr id="9" name="Text 6"/>
           <p:cNvSpPr/>
           <p:nvPr/>
         </p:nvSpPr>
         <p:spPr>
           <a:xfrm>
-            <a:off x="457200" y="6309360"/>
-            <a:ext cx="5486400" cy="228600"/>
-          </a:xfrm>
-          <a:prstGeom prst="rect">
-            <a:avLst/>
-          </a:prstGeom>
-          <a:noFill/>
-          <a:ln/>
-        </p:spPr>
-        <p:txBody>
-          <a:bodyPr wrap="square" lIns="0" tIns="0" rIns="0" bIns="0" rtlCol="0" anchor="ctr"/>
-          <a:lstStyle/>
-          <a:p>
-            <a:pPr algn="l" indent="0" marL="0">
-              <a:buNone/>
-            </a:pPr>
-            <a:r>
-              <a:rPr lang="en-US" sz="700" dirty="0">
-                <a:solidFill>
-                  <a:srgbClr val="999999"/>
-                </a:solidFill>
-                <a:latin typeface="Calibri" pitchFamily="34" charset="0"/>
-                <a:ea typeface="Calibri" pitchFamily="34" charset="-122"/>
-                <a:cs typeface="Calibri" pitchFamily="34" charset="-120"/>
-              </a:rPr>
-              <a:t>Source: Dutch Ministry of Economic Affairs; European Commission; McKinsey analysis</a:t>
-            </a:r>
-            <a:endParaRPr lang="en-US" sz="700" dirty="0"/>
-          </a:p>
-        </p:txBody>
-      </p:sp>
-      <p:sp>
-        <p:nvSpPr>
-          <p:cNvPr id="28" name="Text 25"/>
-          <p:cNvSpPr/>
-          <p:nvPr/>
-        </p:nvSpPr>
-        <p:spPr>
-          <a:xfrm>
-            <a:off x="6400800" y="6309360"/>
-            <a:ext cx="2286000" cy="228600"/>
+            <a:off x="6400800" y="4892040"/>
+            <a:ext cx="2286000" cy="182880"/>
           </a:xfrm>
           <a:prstGeom prst="rect">
             <a:avLst/>
@@ -3417,29 +3409,15 @@
               <a:buNone/>
             </a:pPr>
             <a:r>
-              <a:rPr lang="en-US" sz="800" b="1" dirty="0">
+              <a:rPr lang="en-US" sz="800" dirty="0">
                 <a:solidFill>
-                  <a:srgbClr val="000000"/>
+                  <a:srgbClr val="666666"/>
                 </a:solidFill>
                 <a:latin typeface="Calibri" pitchFamily="34" charset="0"/>
                 <a:ea typeface="Calibri" pitchFamily="34" charset="-122"/>
                 <a:cs typeface="Calibri" pitchFamily="34" charset="-120"/>
               </a:rPr>
-              <a:t>McKinsey &amp; Company</a:t>
-            </a:r>
-            <a:pPr algn="r" indent="0" marL="0">
-              <a:buNone/>
-            </a:pPr>
-            <a:r>
-              <a:rPr lang="en-US" sz="800" dirty="0">
-                <a:solidFill>
-                  <a:srgbClr val="999999"/>
-                </a:solidFill>
-                <a:latin typeface="Calibri" pitchFamily="34" charset="0"/>
-                <a:ea typeface="Calibri" pitchFamily="34" charset="-122"/>
-                <a:cs typeface="Calibri" pitchFamily="34" charset="-120"/>
-              </a:rPr>
-              <a:t>  1</a:t>
+              <a:t>McKinsey &amp; Company    4</a:t>
             </a:r>
             <a:endParaRPr lang="en-US" sz="800" dirty="0"/>
           </a:p>
